--- a/slides/pptx/week06.pptx
+++ b/slides/pptx/week06.pptx
@@ -2459,7 +2459,7 @@
     <p:bg>
       <p:bgPr>
         <a:solidFill>
-          <a:srgbClr val="0E1726"/>
+          <a:srgbClr val="FFFFFF"/>
         </a:solidFill>
       </p:bgPr>
     </p:bg>
@@ -2477,38 +2477,9 @@
           <a:chExt cx="0" cy="0"/>
         </a:xfrm>
       </p:grpSpPr>
-      <p:sp>
-        <p:nvSpPr>
-          <p:cNvPr id="2" name="Shape 0"/>
-          <p:cNvSpPr/>
-          <p:nvPr/>
-        </p:nvSpPr>
-        <p:spPr>
-          <a:xfrm>
-            <a:off x="603504" y="411480"/>
-            <a:ext cx="1874520" cy="932688"/>
-          </a:xfrm>
-          <a:prstGeom prst="roundRect">
-            <a:avLst>
-              <a:gd name="adj" fmla="val 7843"/>
-            </a:avLst>
-          </a:prstGeom>
-          <a:solidFill>
-            <a:srgbClr val="FFFFFF"/>
-          </a:solidFill>
-          <a:ln/>
-          <a:effectLst>
-            <a:outerShdw sx="100000" sy="100000" kx="0" ky="0" algn="bl" rotWithShape="0" blurRad="101600" dist="38100" dir="5400000">
-              <a:srgbClr val="000000">
-                <a:alpha val="35000"/>
-              </a:srgbClr>
-            </a:outerShdw>
-          </a:effectLst>
-        </p:spPr>
-      </p:sp>
       <p:pic>
         <p:nvPicPr>
-          <p:cNvPr id="3" name="Image 0" descr="/Users/pop7/Library/CloudStorage/OneDrive-MonsterConnectCo.,Ltd/Lecture/KOSEN69 - software-security/slides/pptx/assets/logo-small.png">    </p:cNvPr>
+          <p:cNvPr id="2" name="Image 0" descr="/Users/pop7/Library/CloudStorage/OneDrive-MonsterConnectCo.,Ltd/Lecture/KOSEN69 - software-security/slides/pptx/assets/logo-small.png">    </p:cNvPr>
           <p:cNvPicPr>
             <a:picLocks noChangeAspect="1"/>
           </p:cNvPicPr>
@@ -2522,8 +2493,8 @@
         </p:blipFill>
         <p:spPr>
           <a:xfrm>
-            <a:off x="758952" y="566928"/>
-            <a:ext cx="1563624" cy="621792"/>
+            <a:off x="640080" y="502920"/>
+            <a:ext cx="1691640" cy="676656"/>
           </a:xfrm>
           <a:prstGeom prst="rect">
             <a:avLst/>
@@ -2532,7 +2503,7 @@
       </p:pic>
       <p:sp>
         <p:nvSpPr>
-          <p:cNvPr id="4" name="Text 1"/>
+          <p:cNvPr id="3" name="Text 0"/>
           <p:cNvSpPr/>
           <p:nvPr/>
         </p:nvSpPr>
@@ -2571,7 +2542,7 @@
       </p:sp>
       <p:sp>
         <p:nvSpPr>
-          <p:cNvPr id="5" name="Text 2"/>
+          <p:cNvPr id="4" name="Text 1"/>
           <p:cNvSpPr/>
           <p:nvPr/>
         </p:nvSpPr>
@@ -2599,7 +2570,7 @@
             <a:r>
               <a:rPr lang="en-US" sz="4000" b="1" dirty="0">
                 <a:solidFill>
-                  <a:srgbClr val="E6EDF3"/>
+                  <a:srgbClr val="1F2937"/>
                 </a:solidFill>
                 <a:latin typeface="Arial" pitchFamily="34" charset="0"/>
                 <a:ea typeface="Arial" pitchFamily="34" charset="-122"/>
@@ -2613,7 +2584,7 @@
       </p:sp>
       <p:sp>
         <p:nvSpPr>
-          <p:cNvPr id="6" name="Text 3"/>
+          <p:cNvPr id="5" name="Text 2"/>
           <p:cNvSpPr/>
           <p:nvPr/>
         </p:nvSpPr>
@@ -2638,7 +2609,7 @@
             <a:r>
               <a:rPr lang="en-US" sz="1400" dirty="0">
                 <a:solidFill>
-                  <a:srgbClr val="94A3B8"/>
+                  <a:srgbClr val="64748B"/>
                 </a:solidFill>
                 <a:latin typeface="Calibri" pitchFamily="34" charset="0"/>
                 <a:ea typeface="Calibri" pitchFamily="34" charset="-122"/>
@@ -2664,7 +2635,7 @@
     <p:bg>
       <p:bgPr>
         <a:solidFill>
-          <a:srgbClr val="0E1726"/>
+          <a:srgbClr val="FFFFFF"/>
         </a:solidFill>
       </p:bgPr>
     </p:bg>
@@ -2701,9 +2672,9 @@
           </a:solidFill>
           <a:ln/>
           <a:effectLst>
-            <a:outerShdw sx="100000" sy="100000" kx="0" ky="0" algn="bl" rotWithShape="0" blurRad="101600" dist="38100" dir="5400000">
+            <a:outerShdw sx="100000" sy="100000" kx="0" ky="0" algn="bl" rotWithShape="0" blurRad="76200" dist="25400" dir="5400000">
               <a:srgbClr val="000000">
-                <a:alpha val="35000"/>
+                <a:alpha val="12000"/>
               </a:srgbClr>
             </a:outerShdw>
           </a:effectLst>
@@ -2760,7 +2731,7 @@
             <a:r>
               <a:rPr lang="en-US" sz="2600" b="1" dirty="0">
                 <a:solidFill>
-                  <a:srgbClr val="E6EDF3"/>
+                  <a:srgbClr val="1F2937"/>
                 </a:solidFill>
                 <a:latin typeface="Arial" pitchFamily="34" charset="0"/>
                 <a:ea typeface="Arial" pitchFamily="34" charset="-122"/>
@@ -2821,7 +2792,7 @@
                   <a:tcPr marL="76200" marR="76200" marT="38100" marB="38100" anchor="ctr">
                     <a:lnL w="12700" cap="flat" cmpd="sng" algn="ctr">
                       <a:solidFill>
-                        <a:srgbClr val="0E1726"/>
+                        <a:srgbClr val="FFFFFF"/>
                       </a:solidFill>
                       <a:prstDash val="solid"/>
                       <a:round/>
@@ -2830,7 +2801,7 @@
                     </a:lnL>
                     <a:lnR w="12700" cap="flat" cmpd="sng" algn="ctr">
                       <a:solidFill>
-                        <a:srgbClr val="0E1726"/>
+                        <a:srgbClr val="FFFFFF"/>
                       </a:solidFill>
                       <a:prstDash val="solid"/>
                       <a:round/>
@@ -2839,7 +2810,7 @@
                     </a:lnR>
                     <a:lnT w="12700" cap="flat" cmpd="sng" algn="ctr">
                       <a:solidFill>
-                        <a:srgbClr val="0E1726"/>
+                        <a:srgbClr val="FFFFFF"/>
                       </a:solidFill>
                       <a:prstDash val="solid"/>
                       <a:round/>
@@ -2848,7 +2819,7 @@
                     </a:lnT>
                     <a:lnB w="12700" cap="flat" cmpd="sng" algn="ctr">
                       <a:solidFill>
-                        <a:srgbClr val="0E1726"/>
+                        <a:srgbClr val="FFFFFF"/>
                       </a:solidFill>
                       <a:prstDash val="solid"/>
                       <a:round/>
@@ -2882,7 +2853,7 @@
                   <a:tcPr marL="76200" marR="76200" marT="38100" marB="38100" anchor="ctr">
                     <a:lnL w="12700" cap="flat" cmpd="sng" algn="ctr">
                       <a:solidFill>
-                        <a:srgbClr val="0E1726"/>
+                        <a:srgbClr val="FFFFFF"/>
                       </a:solidFill>
                       <a:prstDash val="solid"/>
                       <a:round/>
@@ -2891,7 +2862,7 @@
                     </a:lnL>
                     <a:lnR w="12700" cap="flat" cmpd="sng" algn="ctr">
                       <a:solidFill>
-                        <a:srgbClr val="0E1726"/>
+                        <a:srgbClr val="FFFFFF"/>
                       </a:solidFill>
                       <a:prstDash val="solid"/>
                       <a:round/>
@@ -2900,7 +2871,7 @@
                     </a:lnR>
                     <a:lnT w="12700" cap="flat" cmpd="sng" algn="ctr">
                       <a:solidFill>
-                        <a:srgbClr val="0E1726"/>
+                        <a:srgbClr val="FFFFFF"/>
                       </a:solidFill>
                       <a:prstDash val="solid"/>
                       <a:round/>
@@ -2909,7 +2880,7 @@
                     </a:lnT>
                     <a:lnB w="12700" cap="flat" cmpd="sng" algn="ctr">
                       <a:solidFill>
-                        <a:srgbClr val="0E1726"/>
+                        <a:srgbClr val="FFFFFF"/>
                       </a:solidFill>
                       <a:prstDash val="solid"/>
                       <a:round/>
@@ -2934,7 +2905,7 @@
                       <a:r>
                         <a:rPr lang="en-US" sz="1200" dirty="0">
                           <a:solidFill>
-                            <a:srgbClr val="E6EDF3"/>
+                            <a:srgbClr val="1F2937"/>
                           </a:solidFill>
                         </a:rPr>
                         <a:t>Developer</a:t>
@@ -2945,7 +2916,7 @@
                   <a:tcPr marL="76200" marR="76200" marT="38100" marB="38100" anchor="ctr">
                     <a:lnL w="12700" cap="flat" cmpd="sng" algn="ctr">
                       <a:solidFill>
-                        <a:srgbClr val="0E1726"/>
+                        <a:srgbClr val="FFFFFF"/>
                       </a:solidFill>
                       <a:prstDash val="solid"/>
                       <a:round/>
@@ -2954,7 +2925,7 @@
                     </a:lnL>
                     <a:lnR w="12700" cap="flat" cmpd="sng" algn="ctr">
                       <a:solidFill>
-                        <a:srgbClr val="0E1726"/>
+                        <a:srgbClr val="FFFFFF"/>
                       </a:solidFill>
                       <a:prstDash val="solid"/>
                       <a:round/>
@@ -2963,7 +2934,7 @@
                     </a:lnR>
                     <a:lnT w="12700" cap="flat" cmpd="sng" algn="ctr">
                       <a:solidFill>
-                        <a:srgbClr val="0E1726"/>
+                        <a:srgbClr val="FFFFFF"/>
                       </a:solidFill>
                       <a:prstDash val="solid"/>
                       <a:round/>
@@ -2972,7 +2943,7 @@
                     </a:lnT>
                     <a:lnB w="12700" cap="flat" cmpd="sng" algn="ctr">
                       <a:solidFill>
-                        <a:srgbClr val="0E1726"/>
+                        <a:srgbClr val="FFFFFF"/>
                       </a:solidFill>
                       <a:prstDash val="solid"/>
                       <a:round/>
@@ -2980,7 +2951,7 @@
                       <a:tailEnd type="none" w="med" len="med"/>
                     </a:lnB>
                     <a:solidFill>
-                      <a:srgbClr val="18243A"/>
+                      <a:srgbClr val="F1F5F9"/>
                     </a:solidFill>
                   </a:tcPr>
                 </a:tc>
@@ -2995,7 +2966,7 @@
                       <a:r>
                         <a:rPr lang="en-US" sz="1200" dirty="0">
                           <a:solidFill>
-                            <a:srgbClr val="E6EDF3"/>
+                            <a:srgbClr val="1F2937"/>
                           </a:solidFill>
                         </a:rPr>
                         <a:t>Read/write Git, JIRA, run unit tests</a:t>
@@ -3006,7 +2977,7 @@
                   <a:tcPr marL="76200" marR="76200" marT="38100" marB="38100" anchor="ctr">
                     <a:lnL w="12700" cap="flat" cmpd="sng" algn="ctr">
                       <a:solidFill>
-                        <a:srgbClr val="0E1726"/>
+                        <a:srgbClr val="FFFFFF"/>
                       </a:solidFill>
                       <a:prstDash val="solid"/>
                       <a:round/>
@@ -3015,7 +2986,7 @@
                     </a:lnL>
                     <a:lnR w="12700" cap="flat" cmpd="sng" algn="ctr">
                       <a:solidFill>
-                        <a:srgbClr val="0E1726"/>
+                        <a:srgbClr val="FFFFFF"/>
                       </a:solidFill>
                       <a:prstDash val="solid"/>
                       <a:round/>
@@ -3024,7 +2995,7 @@
                     </a:lnR>
                     <a:lnT w="12700" cap="flat" cmpd="sng" algn="ctr">
                       <a:solidFill>
-                        <a:srgbClr val="0E1726"/>
+                        <a:srgbClr val="FFFFFF"/>
                       </a:solidFill>
                       <a:prstDash val="solid"/>
                       <a:round/>
@@ -3033,7 +3004,7 @@
                     </a:lnT>
                     <a:lnB w="12700" cap="flat" cmpd="sng" algn="ctr">
                       <a:solidFill>
-                        <a:srgbClr val="0E1726"/>
+                        <a:srgbClr val="FFFFFF"/>
                       </a:solidFill>
                       <a:prstDash val="solid"/>
                       <a:round/>
@@ -3041,7 +3012,7 @@
                       <a:tailEnd type="none" w="med" len="med"/>
                     </a:lnB>
                     <a:solidFill>
-                      <a:srgbClr val="18243A"/>
+                      <a:srgbClr val="F1F5F9"/>
                     </a:solidFill>
                   </a:tcPr>
                 </a:tc>
@@ -3058,7 +3029,7 @@
                       <a:r>
                         <a:rPr lang="en-US" sz="1200" dirty="0">
                           <a:solidFill>
-                            <a:srgbClr val="E6EDF3"/>
+                            <a:srgbClr val="1F2937"/>
                           </a:solidFill>
                         </a:rPr>
                         <a:t>QA Engineer</a:t>
@@ -3069,7 +3040,7 @@
                   <a:tcPr marL="76200" marR="76200" marT="38100" marB="38100" anchor="ctr">
                     <a:lnL w="12700" cap="flat" cmpd="sng" algn="ctr">
                       <a:solidFill>
-                        <a:srgbClr val="0E1726"/>
+                        <a:srgbClr val="FFFFFF"/>
                       </a:solidFill>
                       <a:prstDash val="solid"/>
                       <a:round/>
@@ -3078,7 +3049,7 @@
                     </a:lnL>
                     <a:lnR w="12700" cap="flat" cmpd="sng" algn="ctr">
                       <a:solidFill>
-                        <a:srgbClr val="0E1726"/>
+                        <a:srgbClr val="FFFFFF"/>
                       </a:solidFill>
                       <a:prstDash val="solid"/>
                       <a:round/>
@@ -3087,7 +3058,7 @@
                     </a:lnR>
                     <a:lnT w="12700" cap="flat" cmpd="sng" algn="ctr">
                       <a:solidFill>
-                        <a:srgbClr val="0E1726"/>
+                        <a:srgbClr val="FFFFFF"/>
                       </a:solidFill>
                       <a:prstDash val="solid"/>
                       <a:round/>
@@ -3096,7 +3067,7 @@
                     </a:lnT>
                     <a:lnB w="12700" cap="flat" cmpd="sng" algn="ctr">
                       <a:solidFill>
-                        <a:srgbClr val="0E1726"/>
+                        <a:srgbClr val="FFFFFF"/>
                       </a:solidFill>
                       <a:prstDash val="solid"/>
                       <a:round/>
@@ -3104,7 +3075,7 @@
                       <a:tailEnd type="none" w="med" len="med"/>
                     </a:lnB>
                     <a:solidFill>
-                      <a:srgbClr val="1E2B45"/>
+                      <a:srgbClr val="E8EDF3"/>
                     </a:solidFill>
                   </a:tcPr>
                 </a:tc>
@@ -3119,7 +3090,7 @@
                       <a:r>
                         <a:rPr lang="en-US" sz="1200" dirty="0">
                           <a:solidFill>
-                            <a:srgbClr val="E6EDF3"/>
+                            <a:srgbClr val="1F2937"/>
                           </a:solidFill>
                         </a:rPr>
                         <a:t>Read Git, write test reports, JIRA, deploy to staging</a:t>
@@ -3130,7 +3101,7 @@
                   <a:tcPr marL="76200" marR="76200" marT="38100" marB="38100" anchor="ctr">
                     <a:lnL w="12700" cap="flat" cmpd="sng" algn="ctr">
                       <a:solidFill>
-                        <a:srgbClr val="0E1726"/>
+                        <a:srgbClr val="FFFFFF"/>
                       </a:solidFill>
                       <a:prstDash val="solid"/>
                       <a:round/>
@@ -3139,7 +3110,7 @@
                     </a:lnL>
                     <a:lnR w="12700" cap="flat" cmpd="sng" algn="ctr">
                       <a:solidFill>
-                        <a:srgbClr val="0E1726"/>
+                        <a:srgbClr val="FFFFFF"/>
                       </a:solidFill>
                       <a:prstDash val="solid"/>
                       <a:round/>
@@ -3148,7 +3119,7 @@
                     </a:lnR>
                     <a:lnT w="12700" cap="flat" cmpd="sng" algn="ctr">
                       <a:solidFill>
-                        <a:srgbClr val="0E1726"/>
+                        <a:srgbClr val="FFFFFF"/>
                       </a:solidFill>
                       <a:prstDash val="solid"/>
                       <a:round/>
@@ -3157,7 +3128,7 @@
                     </a:lnT>
                     <a:lnB w="12700" cap="flat" cmpd="sng" algn="ctr">
                       <a:solidFill>
-                        <a:srgbClr val="0E1726"/>
+                        <a:srgbClr val="FFFFFF"/>
                       </a:solidFill>
                       <a:prstDash val="solid"/>
                       <a:round/>
@@ -3165,7 +3136,7 @@
                       <a:tailEnd type="none" w="med" len="med"/>
                     </a:lnB>
                     <a:solidFill>
-                      <a:srgbClr val="1E2B45"/>
+                      <a:srgbClr val="E8EDF3"/>
                     </a:solidFill>
                   </a:tcPr>
                 </a:tc>
@@ -3182,7 +3153,7 @@
                       <a:r>
                         <a:rPr lang="en-US" sz="1200" dirty="0">
                           <a:solidFill>
-                            <a:srgbClr val="E6EDF3"/>
+                            <a:srgbClr val="1F2937"/>
                           </a:solidFill>
                         </a:rPr>
                         <a:t>Project Manager</a:t>
@@ -3193,7 +3164,7 @@
                   <a:tcPr marL="76200" marR="76200" marT="38100" marB="38100" anchor="ctr">
                     <a:lnL w="12700" cap="flat" cmpd="sng" algn="ctr">
                       <a:solidFill>
-                        <a:srgbClr val="0E1726"/>
+                        <a:srgbClr val="FFFFFF"/>
                       </a:solidFill>
                       <a:prstDash val="solid"/>
                       <a:round/>
@@ -3202,7 +3173,7 @@
                     </a:lnL>
                     <a:lnR w="12700" cap="flat" cmpd="sng" algn="ctr">
                       <a:solidFill>
-                        <a:srgbClr val="0E1726"/>
+                        <a:srgbClr val="FFFFFF"/>
                       </a:solidFill>
                       <a:prstDash val="solid"/>
                       <a:round/>
@@ -3211,7 +3182,7 @@
                     </a:lnR>
                     <a:lnT w="12700" cap="flat" cmpd="sng" algn="ctr">
                       <a:solidFill>
-                        <a:srgbClr val="0E1726"/>
+                        <a:srgbClr val="FFFFFF"/>
                       </a:solidFill>
                       <a:prstDash val="solid"/>
                       <a:round/>
@@ -3220,7 +3191,7 @@
                     </a:lnT>
                     <a:lnB w="12700" cap="flat" cmpd="sng" algn="ctr">
                       <a:solidFill>
-                        <a:srgbClr val="0E1726"/>
+                        <a:srgbClr val="FFFFFF"/>
                       </a:solidFill>
                       <a:prstDash val="solid"/>
                       <a:round/>
@@ -3228,7 +3199,7 @@
                       <a:tailEnd type="none" w="med" len="med"/>
                     </a:lnB>
                     <a:solidFill>
-                      <a:srgbClr val="18243A"/>
+                      <a:srgbClr val="F1F5F9"/>
                     </a:solidFill>
                   </a:tcPr>
                 </a:tc>
@@ -3243,7 +3214,7 @@
                       <a:r>
                         <a:rPr lang="en-US" sz="1200" dirty="0">
                           <a:solidFill>
-                            <a:srgbClr val="E6EDF3"/>
+                            <a:srgbClr val="1F2937"/>
                           </a:solidFill>
                         </a:rPr>
                         <a:t>Read Git, JIRA, view dashboard</a:t>
@@ -3254,7 +3225,7 @@
                   <a:tcPr marL="76200" marR="76200" marT="38100" marB="38100" anchor="ctr">
                     <a:lnL w="12700" cap="flat" cmpd="sng" algn="ctr">
                       <a:solidFill>
-                        <a:srgbClr val="0E1726"/>
+                        <a:srgbClr val="FFFFFF"/>
                       </a:solidFill>
                       <a:prstDash val="solid"/>
                       <a:round/>
@@ -3263,7 +3234,7 @@
                     </a:lnL>
                     <a:lnR w="12700" cap="flat" cmpd="sng" algn="ctr">
                       <a:solidFill>
-                        <a:srgbClr val="0E1726"/>
+                        <a:srgbClr val="FFFFFF"/>
                       </a:solidFill>
                       <a:prstDash val="solid"/>
                       <a:round/>
@@ -3272,7 +3243,7 @@
                     </a:lnR>
                     <a:lnT w="12700" cap="flat" cmpd="sng" algn="ctr">
                       <a:solidFill>
-                        <a:srgbClr val="0E1726"/>
+                        <a:srgbClr val="FFFFFF"/>
                       </a:solidFill>
                       <a:prstDash val="solid"/>
                       <a:round/>
@@ -3281,7 +3252,7 @@
                     </a:lnT>
                     <a:lnB w="12700" cap="flat" cmpd="sng" algn="ctr">
                       <a:solidFill>
-                        <a:srgbClr val="0E1726"/>
+                        <a:srgbClr val="FFFFFF"/>
                       </a:solidFill>
                       <a:prstDash val="solid"/>
                       <a:round/>
@@ -3289,7 +3260,7 @@
                       <a:tailEnd type="none" w="med" len="med"/>
                     </a:lnB>
                     <a:solidFill>
-                      <a:srgbClr val="18243A"/>
+                      <a:srgbClr val="F1F5F9"/>
                     </a:solidFill>
                   </a:tcPr>
                 </a:tc>
@@ -3306,7 +3277,7 @@
                       <a:r>
                         <a:rPr lang="en-US" sz="1200" dirty="0">
                           <a:solidFill>
-                            <a:srgbClr val="E6EDF3"/>
+                            <a:srgbClr val="1F2937"/>
                           </a:solidFill>
                         </a:rPr>
                         <a:t>Intern</a:t>
@@ -3317,7 +3288,7 @@
                   <a:tcPr marL="76200" marR="76200" marT="38100" marB="38100" anchor="ctr">
                     <a:lnL w="12700" cap="flat" cmpd="sng" algn="ctr">
                       <a:solidFill>
-                        <a:srgbClr val="0E1726"/>
+                        <a:srgbClr val="FFFFFF"/>
                       </a:solidFill>
                       <a:prstDash val="solid"/>
                       <a:round/>
@@ -3326,7 +3297,7 @@
                     </a:lnL>
                     <a:lnR w="12700" cap="flat" cmpd="sng" algn="ctr">
                       <a:solidFill>
-                        <a:srgbClr val="0E1726"/>
+                        <a:srgbClr val="FFFFFF"/>
                       </a:solidFill>
                       <a:prstDash val="solid"/>
                       <a:round/>
@@ -3335,7 +3306,7 @@
                     </a:lnR>
                     <a:lnT w="12700" cap="flat" cmpd="sng" algn="ctr">
                       <a:solidFill>
-                        <a:srgbClr val="0E1726"/>
+                        <a:srgbClr val="FFFFFF"/>
                       </a:solidFill>
                       <a:prstDash val="solid"/>
                       <a:round/>
@@ -3344,7 +3315,7 @@
                     </a:lnT>
                     <a:lnB w="12700" cap="flat" cmpd="sng" algn="ctr">
                       <a:solidFill>
-                        <a:srgbClr val="0E1726"/>
+                        <a:srgbClr val="FFFFFF"/>
                       </a:solidFill>
                       <a:prstDash val="solid"/>
                       <a:round/>
@@ -3352,7 +3323,7 @@
                       <a:tailEnd type="none" w="med" len="med"/>
                     </a:lnB>
                     <a:solidFill>
-                      <a:srgbClr val="1E2B45"/>
+                      <a:srgbClr val="E8EDF3"/>
                     </a:solidFill>
                   </a:tcPr>
                 </a:tc>
@@ -3367,7 +3338,7 @@
                       <a:r>
                         <a:rPr lang="en-US" sz="1200" dirty="0">
                           <a:solidFill>
-                            <a:srgbClr val="E6EDF3"/>
+                            <a:srgbClr val="1F2937"/>
                           </a:solidFill>
                         </a:rPr>
                         <a:t>Read Git, run unit tests</a:t>
@@ -3378,7 +3349,7 @@
                   <a:tcPr marL="76200" marR="76200" marT="38100" marB="38100" anchor="ctr">
                     <a:lnL w="12700" cap="flat" cmpd="sng" algn="ctr">
                       <a:solidFill>
-                        <a:srgbClr val="0E1726"/>
+                        <a:srgbClr val="FFFFFF"/>
                       </a:solidFill>
                       <a:prstDash val="solid"/>
                       <a:round/>
@@ -3387,7 +3358,7 @@
                     </a:lnL>
                     <a:lnR w="12700" cap="flat" cmpd="sng" algn="ctr">
                       <a:solidFill>
-                        <a:srgbClr val="0E1726"/>
+                        <a:srgbClr val="FFFFFF"/>
                       </a:solidFill>
                       <a:prstDash val="solid"/>
                       <a:round/>
@@ -3396,7 +3367,7 @@
                     </a:lnR>
                     <a:lnT w="12700" cap="flat" cmpd="sng" algn="ctr">
                       <a:solidFill>
-                        <a:srgbClr val="0E1726"/>
+                        <a:srgbClr val="FFFFFF"/>
                       </a:solidFill>
                       <a:prstDash val="solid"/>
                       <a:round/>
@@ -3405,7 +3376,7 @@
                     </a:lnT>
                     <a:lnB w="12700" cap="flat" cmpd="sng" algn="ctr">
                       <a:solidFill>
-                        <a:srgbClr val="0E1726"/>
+                        <a:srgbClr val="FFFFFF"/>
                       </a:solidFill>
                       <a:prstDash val="solid"/>
                       <a:round/>
@@ -3413,7 +3384,7 @@
                       <a:tailEnd type="none" w="med" len="med"/>
                     </a:lnB>
                     <a:solidFill>
-                      <a:srgbClr val="1E2B45"/>
+                      <a:srgbClr val="E8EDF3"/>
                     </a:solidFill>
                   </a:tcPr>
                 </a:tc>
@@ -3508,7 +3479,7 @@
             <a:r>
               <a:rPr lang="en-US" sz="1350" dirty="0">
                 <a:solidFill>
-                  <a:srgbClr val="E6EDF3"/>
+                  <a:srgbClr val="1F2937"/>
                 </a:solidFill>
                 <a:latin typeface="Calibri" pitchFamily="34" charset="0"/>
                 <a:ea typeface="Calibri" pitchFamily="34" charset="-122"/>
@@ -3606,7 +3577,7 @@
             <a:r>
               <a:rPr lang="en-US" sz="1350" dirty="0">
                 <a:solidFill>
-                  <a:srgbClr val="E6EDF3"/>
+                  <a:srgbClr val="1F2937"/>
                 </a:solidFill>
                 <a:latin typeface="Calibri" pitchFamily="34" charset="0"/>
                 <a:ea typeface="Calibri" pitchFamily="34" charset="-122"/>
@@ -3645,7 +3616,7 @@
             <a:r>
               <a:rPr lang="en-US" sz="900" dirty="0">
                 <a:solidFill>
-                  <a:srgbClr val="94A3B8"/>
+                  <a:srgbClr val="64748B"/>
                 </a:solidFill>
                 <a:latin typeface="Calibri" pitchFamily="34" charset="0"/>
                 <a:ea typeface="Calibri" pitchFamily="34" charset="-122"/>
@@ -3657,38 +3628,9 @@
           </a:p>
         </p:txBody>
       </p:sp>
-      <p:sp>
-        <p:nvSpPr>
-          <p:cNvPr id="13" name="Shape 9"/>
-          <p:cNvSpPr/>
-          <p:nvPr/>
-        </p:nvSpPr>
-        <p:spPr>
-          <a:xfrm>
-            <a:off x="7772400" y="4590288"/>
-            <a:ext cx="969264" cy="475488"/>
-          </a:xfrm>
-          <a:prstGeom prst="roundRect">
-            <a:avLst>
-              <a:gd name="adj" fmla="val 11538"/>
-            </a:avLst>
-          </a:prstGeom>
-          <a:solidFill>
-            <a:srgbClr val="FFFFFF"/>
-          </a:solidFill>
-          <a:ln/>
-          <a:effectLst>
-            <a:outerShdw sx="100000" sy="100000" kx="0" ky="0" algn="bl" rotWithShape="0" blurRad="101600" dist="38100" dir="5400000">
-              <a:srgbClr val="000000">
-                <a:alpha val="35000"/>
-              </a:srgbClr>
-            </a:outerShdw>
-          </a:effectLst>
-        </p:spPr>
-      </p:sp>
       <p:pic>
         <p:nvPicPr>
-          <p:cNvPr id="14" name="Image 1" descr="/Users/pop7/Library/CloudStorage/OneDrive-MonsterConnectCo.,Ltd/Lecture/KOSEN69 - software-security/slides/pptx/assets/logo-small.png">    </p:cNvPr>
+          <p:cNvPr id="13" name="Image 1" descr="/Users/pop7/Library/CloudStorage/OneDrive-MonsterConnectCo.,Ltd/Lecture/KOSEN69 - software-security/slides/pptx/assets/logo-small.png">    </p:cNvPr>
           <p:cNvPicPr>
             <a:picLocks noChangeAspect="1"/>
           </p:cNvPicPr>
@@ -3702,7 +3644,7 @@
         </p:blipFill>
         <p:spPr>
           <a:xfrm>
-            <a:off x="7872984" y="4681728"/>
+            <a:off x="7882128" y="4700016"/>
             <a:ext cx="768096" cy="356616"/>
           </a:xfrm>
           <a:prstGeom prst="rect">
@@ -3724,7 +3666,7 @@
     <p:bg>
       <p:bgPr>
         <a:solidFill>
-          <a:srgbClr val="0E1726"/>
+          <a:srgbClr val="FFFFFF"/>
         </a:solidFill>
       </p:bgPr>
     </p:bg>
@@ -3761,9 +3703,9 @@
           </a:solidFill>
           <a:ln/>
           <a:effectLst>
-            <a:outerShdw sx="100000" sy="100000" kx="0" ky="0" algn="bl" rotWithShape="0" blurRad="101600" dist="38100" dir="5400000">
+            <a:outerShdw sx="100000" sy="100000" kx="0" ky="0" algn="bl" rotWithShape="0" blurRad="76200" dist="25400" dir="5400000">
               <a:srgbClr val="000000">
-                <a:alpha val="35000"/>
+                <a:alpha val="12000"/>
               </a:srgbClr>
             </a:outerShdw>
           </a:effectLst>
@@ -3820,7 +3762,7 @@
             <a:r>
               <a:rPr lang="en-US" sz="2600" b="1" dirty="0">
                 <a:solidFill>
-                  <a:srgbClr val="E6EDF3"/>
+                  <a:srgbClr val="1F2937"/>
                 </a:solidFill>
                 <a:latin typeface="Arial" pitchFamily="34" charset="0"/>
                 <a:ea typeface="Arial" pitchFamily="34" charset="-122"/>
@@ -3859,7 +3801,7 @@
             <a:r>
               <a:rPr lang="en-US" sz="1400" dirty="0">
                 <a:solidFill>
-                  <a:srgbClr val="E6EDF3"/>
+                  <a:srgbClr val="1F2937"/>
                 </a:solidFill>
                 <a:latin typeface="Calibri" pitchFamily="34" charset="0"/>
                 <a:ea typeface="Calibri" pitchFamily="34" charset="-122"/>
@@ -3892,7 +3834,7 @@
           </a:solidFill>
           <a:ln w="12700">
             <a:solidFill>
-              <a:srgbClr val="1E2B45"/>
+              <a:srgbClr val="E8EDF3"/>
             </a:solidFill>
             <a:prstDash val="solid"/>
           </a:ln>
@@ -3988,13 +3930,13 @@
             </a:avLst>
           </a:prstGeom>
           <a:solidFill>
-            <a:srgbClr val="18243A"/>
+            <a:srgbClr val="F1F5F9"/>
           </a:solidFill>
           <a:ln/>
           <a:effectLst>
-            <a:outerShdw sx="100000" sy="100000" kx="0" ky="0" algn="bl" rotWithShape="0" blurRad="101600" dist="38100" dir="5400000">
+            <a:outerShdw sx="100000" sy="100000" kx="0" ky="0" algn="bl" rotWithShape="0" blurRad="76200" dist="25400" dir="5400000">
               <a:srgbClr val="000000">
-                <a:alpha val="35000"/>
+                <a:alpha val="12000"/>
               </a:srgbClr>
             </a:outerShdw>
           </a:effectLst>
@@ -4031,7 +3973,7 @@
             <a:r>
               <a:rPr lang="en-US" sz="1400" dirty="0">
                 <a:solidFill>
-                  <a:srgbClr val="E6EDF3"/>
+                  <a:srgbClr val="1F2937"/>
                 </a:solidFill>
                 <a:latin typeface="Calibri" pitchFamily="34" charset="0"/>
                 <a:ea typeface="Calibri" pitchFamily="34" charset="-122"/>
@@ -4070,7 +4012,7 @@
             <a:r>
               <a:rPr lang="en-US" sz="900" dirty="0">
                 <a:solidFill>
-                  <a:srgbClr val="94A3B8"/>
+                  <a:srgbClr val="64748B"/>
                 </a:solidFill>
                 <a:latin typeface="Calibri" pitchFamily="34" charset="0"/>
                 <a:ea typeface="Calibri" pitchFamily="34" charset="-122"/>
@@ -4082,38 +4024,9 @@
           </a:p>
         </p:txBody>
       </p:sp>
-      <p:sp>
-        <p:nvSpPr>
-          <p:cNvPr id="11" name="Shape 8"/>
-          <p:cNvSpPr/>
-          <p:nvPr/>
-        </p:nvSpPr>
-        <p:spPr>
-          <a:xfrm>
-            <a:off x="7772400" y="4590288"/>
-            <a:ext cx="969264" cy="475488"/>
-          </a:xfrm>
-          <a:prstGeom prst="roundRect">
-            <a:avLst>
-              <a:gd name="adj" fmla="val 11538"/>
-            </a:avLst>
-          </a:prstGeom>
-          <a:solidFill>
-            <a:srgbClr val="FFFFFF"/>
-          </a:solidFill>
-          <a:ln/>
-          <a:effectLst>
-            <a:outerShdw sx="100000" sy="100000" kx="0" ky="0" algn="bl" rotWithShape="0" blurRad="101600" dist="38100" dir="5400000">
-              <a:srgbClr val="000000">
-                <a:alpha val="35000"/>
-              </a:srgbClr>
-            </a:outerShdw>
-          </a:effectLst>
-        </p:spPr>
-      </p:sp>
       <p:pic>
         <p:nvPicPr>
-          <p:cNvPr id="12" name="Image 1" descr="/Users/pop7/Library/CloudStorage/OneDrive-MonsterConnectCo.,Ltd/Lecture/KOSEN69 - software-security/slides/pptx/assets/logo-small.png">    </p:cNvPr>
+          <p:cNvPr id="11" name="Image 1" descr="/Users/pop7/Library/CloudStorage/OneDrive-MonsterConnectCo.,Ltd/Lecture/KOSEN69 - software-security/slides/pptx/assets/logo-small.png">    </p:cNvPr>
           <p:cNvPicPr>
             <a:picLocks noChangeAspect="1"/>
           </p:cNvPicPr>
@@ -4127,7 +4040,7 @@
         </p:blipFill>
         <p:spPr>
           <a:xfrm>
-            <a:off x="7872984" y="4681728"/>
+            <a:off x="7882128" y="4700016"/>
             <a:ext cx="768096" cy="356616"/>
           </a:xfrm>
           <a:prstGeom prst="rect">
@@ -4149,7 +4062,7 @@
     <p:bg>
       <p:bgPr>
         <a:solidFill>
-          <a:srgbClr val="0E1726"/>
+          <a:srgbClr val="FFFFFF"/>
         </a:solidFill>
       </p:bgPr>
     </p:bg>
@@ -4186,9 +4099,9 @@
           </a:solidFill>
           <a:ln/>
           <a:effectLst>
-            <a:outerShdw sx="100000" sy="100000" kx="0" ky="0" algn="bl" rotWithShape="0" blurRad="101600" dist="38100" dir="5400000">
+            <a:outerShdw sx="100000" sy="100000" kx="0" ky="0" algn="bl" rotWithShape="0" blurRad="76200" dist="25400" dir="5400000">
               <a:srgbClr val="000000">
-                <a:alpha val="35000"/>
+                <a:alpha val="12000"/>
               </a:srgbClr>
             </a:outerShdw>
           </a:effectLst>
@@ -4245,7 +4158,7 @@
             <a:r>
               <a:rPr lang="en-US" sz="2600" b="1" dirty="0">
                 <a:solidFill>
-                  <a:srgbClr val="E6EDF3"/>
+                  <a:srgbClr val="1F2937"/>
                 </a:solidFill>
                 <a:latin typeface="Arial" pitchFamily="34" charset="0"/>
                 <a:ea typeface="Arial" pitchFamily="34" charset="-122"/>
@@ -4274,13 +4187,13 @@
             </a:avLst>
           </a:prstGeom>
           <a:solidFill>
-            <a:srgbClr val="18243A"/>
+            <a:srgbClr val="F1F5F9"/>
           </a:solidFill>
           <a:ln/>
           <a:effectLst>
-            <a:outerShdw sx="100000" sy="100000" kx="0" ky="0" algn="bl" rotWithShape="0" blurRad="101600" dist="38100" dir="5400000">
+            <a:outerShdw sx="100000" sy="100000" kx="0" ky="0" algn="bl" rotWithShape="0" blurRad="76200" dist="25400" dir="5400000">
               <a:srgbClr val="000000">
-                <a:alpha val="35000"/>
+                <a:alpha val="12000"/>
               </a:srgbClr>
             </a:outerShdw>
           </a:effectLst>
@@ -4317,7 +4230,7 @@
             <a:r>
               <a:rPr lang="en-US" sz="1400" dirty="0">
                 <a:solidFill>
-                  <a:srgbClr val="E6EDF3"/>
+                  <a:srgbClr val="1F2937"/>
                 </a:solidFill>
                 <a:latin typeface="Calibri" pitchFamily="34" charset="0"/>
                 <a:ea typeface="Calibri" pitchFamily="34" charset="-122"/>
@@ -4338,7 +4251,7 @@
             <a:r>
               <a:rPr lang="en-US" sz="1400" dirty="0">
                 <a:solidFill>
-                  <a:srgbClr val="E6EDF3"/>
+                  <a:srgbClr val="1F2937"/>
                 </a:solidFill>
                 <a:latin typeface="Calibri" pitchFamily="34" charset="0"/>
                 <a:ea typeface="Calibri" pitchFamily="34" charset="-122"/>
@@ -4359,7 +4272,7 @@
             <a:r>
               <a:rPr lang="en-US" sz="1400" dirty="0">
                 <a:solidFill>
-                  <a:srgbClr val="E6EDF3"/>
+                  <a:srgbClr val="1F2937"/>
                 </a:solidFill>
                 <a:latin typeface="Calibri" pitchFamily="34" charset="0"/>
                 <a:ea typeface="Calibri" pitchFamily="34" charset="-122"/>
@@ -4398,7 +4311,7 @@
             <a:r>
               <a:rPr lang="en-US" sz="900" dirty="0">
                 <a:solidFill>
-                  <a:srgbClr val="94A3B8"/>
+                  <a:srgbClr val="64748B"/>
                 </a:solidFill>
                 <a:latin typeface="Calibri" pitchFamily="34" charset="0"/>
                 <a:ea typeface="Calibri" pitchFamily="34" charset="-122"/>
@@ -4410,38 +4323,9 @@
           </a:p>
         </p:txBody>
       </p:sp>
-      <p:sp>
-        <p:nvSpPr>
-          <p:cNvPr id="8" name="Shape 5"/>
-          <p:cNvSpPr/>
-          <p:nvPr/>
-        </p:nvSpPr>
-        <p:spPr>
-          <a:xfrm>
-            <a:off x="7772400" y="4590288"/>
-            <a:ext cx="969264" cy="475488"/>
-          </a:xfrm>
-          <a:prstGeom prst="roundRect">
-            <a:avLst>
-              <a:gd name="adj" fmla="val 11538"/>
-            </a:avLst>
-          </a:prstGeom>
-          <a:solidFill>
-            <a:srgbClr val="FFFFFF"/>
-          </a:solidFill>
-          <a:ln/>
-          <a:effectLst>
-            <a:outerShdw sx="100000" sy="100000" kx="0" ky="0" algn="bl" rotWithShape="0" blurRad="101600" dist="38100" dir="5400000">
-              <a:srgbClr val="000000">
-                <a:alpha val="35000"/>
-              </a:srgbClr>
-            </a:outerShdw>
-          </a:effectLst>
-        </p:spPr>
-      </p:sp>
       <p:pic>
         <p:nvPicPr>
-          <p:cNvPr id="9" name="Image 1" descr="/Users/pop7/Library/CloudStorage/OneDrive-MonsterConnectCo.,Ltd/Lecture/KOSEN69 - software-security/slides/pptx/assets/logo-small.png">    </p:cNvPr>
+          <p:cNvPr id="8" name="Image 1" descr="/Users/pop7/Library/CloudStorage/OneDrive-MonsterConnectCo.,Ltd/Lecture/KOSEN69 - software-security/slides/pptx/assets/logo-small.png">    </p:cNvPr>
           <p:cNvPicPr>
             <a:picLocks noChangeAspect="1"/>
           </p:cNvPicPr>
@@ -4455,7 +4339,7 @@
         </p:blipFill>
         <p:spPr>
           <a:xfrm>
-            <a:off x="7872984" y="4681728"/>
+            <a:off x="7882128" y="4700016"/>
             <a:ext cx="768096" cy="356616"/>
           </a:xfrm>
           <a:prstGeom prst="rect">
@@ -4477,7 +4361,7 @@
     <p:bg>
       <p:bgPr>
         <a:solidFill>
-          <a:srgbClr val="0E1726"/>
+          <a:srgbClr val="FFFFFF"/>
         </a:solidFill>
       </p:bgPr>
     </p:bg>
@@ -4514,9 +4398,9 @@
           </a:solidFill>
           <a:ln/>
           <a:effectLst>
-            <a:outerShdw sx="100000" sy="100000" kx="0" ky="0" algn="bl" rotWithShape="0" blurRad="101600" dist="38100" dir="5400000">
+            <a:outerShdw sx="100000" sy="100000" kx="0" ky="0" algn="bl" rotWithShape="0" blurRad="76200" dist="25400" dir="5400000">
               <a:srgbClr val="000000">
-                <a:alpha val="35000"/>
+                <a:alpha val="12000"/>
               </a:srgbClr>
             </a:outerShdw>
           </a:effectLst>
@@ -4573,7 +4457,7 @@
             <a:r>
               <a:rPr lang="en-US" sz="2600" b="1" dirty="0">
                 <a:solidFill>
-                  <a:srgbClr val="E6EDF3"/>
+                  <a:srgbClr val="1F2937"/>
                 </a:solidFill>
                 <a:latin typeface="Arial" pitchFamily="34" charset="0"/>
                 <a:ea typeface="Arial" pitchFamily="34" charset="-122"/>
@@ -4602,13 +4486,13 @@
             </a:avLst>
           </a:prstGeom>
           <a:solidFill>
-            <a:srgbClr val="18243A"/>
+            <a:srgbClr val="F1F5F9"/>
           </a:solidFill>
           <a:ln/>
           <a:effectLst>
-            <a:outerShdw sx="100000" sy="100000" kx="0" ky="0" algn="bl" rotWithShape="0" blurRad="101600" dist="38100" dir="5400000">
+            <a:outerShdw sx="100000" sy="100000" kx="0" ky="0" algn="bl" rotWithShape="0" blurRad="76200" dist="25400" dir="5400000">
               <a:srgbClr val="000000">
-                <a:alpha val="35000"/>
+                <a:alpha val="12000"/>
               </a:srgbClr>
             </a:outerShdw>
           </a:effectLst>
@@ -4645,7 +4529,7 @@
             <a:r>
               <a:rPr lang="en-US" sz="1400" dirty="0">
                 <a:solidFill>
-                  <a:srgbClr val="E6EDF3"/>
+                  <a:srgbClr val="1F2937"/>
                 </a:solidFill>
                 <a:latin typeface="Calibri" pitchFamily="34" charset="0"/>
                 <a:ea typeface="Calibri" pitchFamily="34" charset="-122"/>
@@ -4666,7 +4550,7 @@
             <a:r>
               <a:rPr lang="en-US" sz="1400" dirty="0">
                 <a:solidFill>
-                  <a:srgbClr val="E6EDF3"/>
+                  <a:srgbClr val="1F2937"/>
                 </a:solidFill>
                 <a:latin typeface="Calibri" pitchFamily="34" charset="0"/>
                 <a:ea typeface="Calibri" pitchFamily="34" charset="-122"/>
@@ -4687,7 +4571,7 @@
             <a:r>
               <a:rPr lang="en-US" sz="1400" dirty="0">
                 <a:solidFill>
-                  <a:srgbClr val="E6EDF3"/>
+                  <a:srgbClr val="1F2937"/>
                 </a:solidFill>
                 <a:latin typeface="Calibri" pitchFamily="34" charset="0"/>
                 <a:ea typeface="Calibri" pitchFamily="34" charset="-122"/>
@@ -4708,7 +4592,7 @@
             <a:r>
               <a:rPr lang="en-US" sz="1400" dirty="0">
                 <a:solidFill>
-                  <a:srgbClr val="E6EDF3"/>
+                  <a:srgbClr val="1F2937"/>
                 </a:solidFill>
                 <a:latin typeface="Calibri" pitchFamily="34" charset="0"/>
                 <a:ea typeface="Calibri" pitchFamily="34" charset="-122"/>
@@ -4729,7 +4613,7 @@
             <a:r>
               <a:rPr lang="en-US" sz="1400" dirty="0">
                 <a:solidFill>
-                  <a:srgbClr val="E6EDF3"/>
+                  <a:srgbClr val="1F2937"/>
                 </a:solidFill>
                 <a:latin typeface="Calibri" pitchFamily="34" charset="0"/>
                 <a:ea typeface="Calibri" pitchFamily="34" charset="-122"/>
@@ -4768,7 +4652,7 @@
             <a:r>
               <a:rPr lang="en-US" sz="900" dirty="0">
                 <a:solidFill>
-                  <a:srgbClr val="94A3B8"/>
+                  <a:srgbClr val="64748B"/>
                 </a:solidFill>
                 <a:latin typeface="Calibri" pitchFamily="34" charset="0"/>
                 <a:ea typeface="Calibri" pitchFamily="34" charset="-122"/>
@@ -4780,38 +4664,9 @@
           </a:p>
         </p:txBody>
       </p:sp>
-      <p:sp>
-        <p:nvSpPr>
-          <p:cNvPr id="8" name="Shape 5"/>
-          <p:cNvSpPr/>
-          <p:nvPr/>
-        </p:nvSpPr>
-        <p:spPr>
-          <a:xfrm>
-            <a:off x="7772400" y="4590288"/>
-            <a:ext cx="969264" cy="475488"/>
-          </a:xfrm>
-          <a:prstGeom prst="roundRect">
-            <a:avLst>
-              <a:gd name="adj" fmla="val 11538"/>
-            </a:avLst>
-          </a:prstGeom>
-          <a:solidFill>
-            <a:srgbClr val="FFFFFF"/>
-          </a:solidFill>
-          <a:ln/>
-          <a:effectLst>
-            <a:outerShdw sx="100000" sy="100000" kx="0" ky="0" algn="bl" rotWithShape="0" blurRad="101600" dist="38100" dir="5400000">
-              <a:srgbClr val="000000">
-                <a:alpha val="35000"/>
-              </a:srgbClr>
-            </a:outerShdw>
-          </a:effectLst>
-        </p:spPr>
-      </p:sp>
       <p:pic>
         <p:nvPicPr>
-          <p:cNvPr id="9" name="Image 1" descr="/Users/pop7/Library/CloudStorage/OneDrive-MonsterConnectCo.,Ltd/Lecture/KOSEN69 - software-security/slides/pptx/assets/logo-small.png">    </p:cNvPr>
+          <p:cNvPr id="8" name="Image 1" descr="/Users/pop7/Library/CloudStorage/OneDrive-MonsterConnectCo.,Ltd/Lecture/KOSEN69 - software-security/slides/pptx/assets/logo-small.png">    </p:cNvPr>
           <p:cNvPicPr>
             <a:picLocks noChangeAspect="1"/>
           </p:cNvPicPr>
@@ -4825,7 +4680,7 @@
         </p:blipFill>
         <p:spPr>
           <a:xfrm>
-            <a:off x="7872984" y="4681728"/>
+            <a:off x="7882128" y="4700016"/>
             <a:ext cx="768096" cy="356616"/>
           </a:xfrm>
           <a:prstGeom prst="rect">
@@ -4847,7 +4702,7 @@
     <p:bg>
       <p:bgPr>
         <a:solidFill>
-          <a:srgbClr val="0E1726"/>
+          <a:srgbClr val="FFFFFF"/>
         </a:solidFill>
       </p:bgPr>
     </p:bg>
@@ -4884,9 +4739,9 @@
           </a:solidFill>
           <a:ln/>
           <a:effectLst>
-            <a:outerShdw sx="100000" sy="100000" kx="0" ky="0" algn="bl" rotWithShape="0" blurRad="101600" dist="38100" dir="5400000">
+            <a:outerShdw sx="100000" sy="100000" kx="0" ky="0" algn="bl" rotWithShape="0" blurRad="76200" dist="25400" dir="5400000">
               <a:srgbClr val="000000">
-                <a:alpha val="35000"/>
+                <a:alpha val="12000"/>
               </a:srgbClr>
             </a:outerShdw>
           </a:effectLst>
@@ -4943,7 +4798,7 @@
             <a:r>
               <a:rPr lang="en-US" sz="2600" b="1" dirty="0">
                 <a:solidFill>
-                  <a:srgbClr val="E6EDF3"/>
+                  <a:srgbClr val="1F2937"/>
                 </a:solidFill>
                 <a:latin typeface="Arial" pitchFamily="34" charset="0"/>
                 <a:ea typeface="Arial" pitchFamily="34" charset="-122"/>
@@ -5004,7 +4859,7 @@
                   <a:tcPr marL="76200" marR="76200" marT="38100" marB="38100" anchor="ctr">
                     <a:lnL w="12700" cap="flat" cmpd="sng" algn="ctr">
                       <a:solidFill>
-                        <a:srgbClr val="0E1726"/>
+                        <a:srgbClr val="FFFFFF"/>
                       </a:solidFill>
                       <a:prstDash val="solid"/>
                       <a:round/>
@@ -5013,7 +4868,7 @@
                     </a:lnL>
                     <a:lnR w="12700" cap="flat" cmpd="sng" algn="ctr">
                       <a:solidFill>
-                        <a:srgbClr val="0E1726"/>
+                        <a:srgbClr val="FFFFFF"/>
                       </a:solidFill>
                       <a:prstDash val="solid"/>
                       <a:round/>
@@ -5022,7 +4877,7 @@
                     </a:lnR>
                     <a:lnT w="12700" cap="flat" cmpd="sng" algn="ctr">
                       <a:solidFill>
-                        <a:srgbClr val="0E1726"/>
+                        <a:srgbClr val="FFFFFF"/>
                       </a:solidFill>
                       <a:prstDash val="solid"/>
                       <a:round/>
@@ -5031,7 +4886,7 @@
                     </a:lnT>
                     <a:lnB w="12700" cap="flat" cmpd="sng" algn="ctr">
                       <a:solidFill>
-                        <a:srgbClr val="0E1726"/>
+                        <a:srgbClr val="FFFFFF"/>
                       </a:solidFill>
                       <a:prstDash val="solid"/>
                       <a:round/>
@@ -5065,7 +4920,7 @@
                   <a:tcPr marL="76200" marR="76200" marT="38100" marB="38100" anchor="ctr">
                     <a:lnL w="12700" cap="flat" cmpd="sng" algn="ctr">
                       <a:solidFill>
-                        <a:srgbClr val="0E1726"/>
+                        <a:srgbClr val="FFFFFF"/>
                       </a:solidFill>
                       <a:prstDash val="solid"/>
                       <a:round/>
@@ -5074,7 +4929,7 @@
                     </a:lnL>
                     <a:lnR w="12700" cap="flat" cmpd="sng" algn="ctr">
                       <a:solidFill>
-                        <a:srgbClr val="0E1726"/>
+                        <a:srgbClr val="FFFFFF"/>
                       </a:solidFill>
                       <a:prstDash val="solid"/>
                       <a:round/>
@@ -5083,7 +4938,7 @@
                     </a:lnR>
                     <a:lnT w="12700" cap="flat" cmpd="sng" algn="ctr">
                       <a:solidFill>
-                        <a:srgbClr val="0E1726"/>
+                        <a:srgbClr val="FFFFFF"/>
                       </a:solidFill>
                       <a:prstDash val="solid"/>
                       <a:round/>
@@ -5092,7 +4947,7 @@
                     </a:lnT>
                     <a:lnB w="12700" cap="flat" cmpd="sng" algn="ctr">
                       <a:solidFill>
-                        <a:srgbClr val="0E1726"/>
+                        <a:srgbClr val="FFFFFF"/>
                       </a:solidFill>
                       <a:prstDash val="solid"/>
                       <a:round/>
@@ -5117,7 +4972,7 @@
                       <a:r>
                         <a:rPr lang="en-US" sz="1200" dirty="0">
                           <a:solidFill>
-                            <a:srgbClr val="E6EDF3"/>
+                            <a:srgbClr val="1F2937"/>
                           </a:solidFill>
                         </a:rPr>
                         <a:t>Proxy</a:t>
@@ -5128,7 +4983,7 @@
                   <a:tcPr marL="76200" marR="76200" marT="38100" marB="38100" anchor="ctr">
                     <a:lnL w="12700" cap="flat" cmpd="sng" algn="ctr">
                       <a:solidFill>
-                        <a:srgbClr val="0E1726"/>
+                        <a:srgbClr val="FFFFFF"/>
                       </a:solidFill>
                       <a:prstDash val="solid"/>
                       <a:round/>
@@ -5137,7 +4992,7 @@
                     </a:lnL>
                     <a:lnR w="12700" cap="flat" cmpd="sng" algn="ctr">
                       <a:solidFill>
-                        <a:srgbClr val="0E1726"/>
+                        <a:srgbClr val="FFFFFF"/>
                       </a:solidFill>
                       <a:prstDash val="solid"/>
                       <a:round/>
@@ -5146,7 +5001,7 @@
                     </a:lnR>
                     <a:lnT w="12700" cap="flat" cmpd="sng" algn="ctr">
                       <a:solidFill>
-                        <a:srgbClr val="0E1726"/>
+                        <a:srgbClr val="FFFFFF"/>
                       </a:solidFill>
                       <a:prstDash val="solid"/>
                       <a:round/>
@@ -5155,7 +5010,7 @@
                     </a:lnT>
                     <a:lnB w="12700" cap="flat" cmpd="sng" algn="ctr">
                       <a:solidFill>
-                        <a:srgbClr val="0E1726"/>
+                        <a:srgbClr val="FFFFFF"/>
                       </a:solidFill>
                       <a:prstDash val="solid"/>
                       <a:round/>
@@ -5163,7 +5018,7 @@
                       <a:tailEnd type="none" w="med" len="med"/>
                     </a:lnB>
                     <a:solidFill>
-                      <a:srgbClr val="18243A"/>
+                      <a:srgbClr val="F1F5F9"/>
                     </a:solidFill>
                   </a:tcPr>
                 </a:tc>
@@ -5178,7 +5033,7 @@
                       <a:r>
                         <a:rPr lang="en-US" sz="1200" dirty="0">
                           <a:solidFill>
-                            <a:srgbClr val="E6EDF3"/>
+                            <a:srgbClr val="1F2937"/>
                           </a:solidFill>
                         </a:rPr>
                         <a:t>intercept &amp; modify requests</a:t>
@@ -5189,7 +5044,7 @@
                   <a:tcPr marL="76200" marR="76200" marT="38100" marB="38100" anchor="ctr">
                     <a:lnL w="12700" cap="flat" cmpd="sng" algn="ctr">
                       <a:solidFill>
-                        <a:srgbClr val="0E1726"/>
+                        <a:srgbClr val="FFFFFF"/>
                       </a:solidFill>
                       <a:prstDash val="solid"/>
                       <a:round/>
@@ -5198,7 +5053,7 @@
                     </a:lnL>
                     <a:lnR w="12700" cap="flat" cmpd="sng" algn="ctr">
                       <a:solidFill>
-                        <a:srgbClr val="0E1726"/>
+                        <a:srgbClr val="FFFFFF"/>
                       </a:solidFill>
                       <a:prstDash val="solid"/>
                       <a:round/>
@@ -5207,7 +5062,7 @@
                     </a:lnR>
                     <a:lnT w="12700" cap="flat" cmpd="sng" algn="ctr">
                       <a:solidFill>
-                        <a:srgbClr val="0E1726"/>
+                        <a:srgbClr val="FFFFFF"/>
                       </a:solidFill>
                       <a:prstDash val="solid"/>
                       <a:round/>
@@ -5216,7 +5071,7 @@
                     </a:lnT>
                     <a:lnB w="12700" cap="flat" cmpd="sng" algn="ctr">
                       <a:solidFill>
-                        <a:srgbClr val="0E1726"/>
+                        <a:srgbClr val="FFFFFF"/>
                       </a:solidFill>
                       <a:prstDash val="solid"/>
                       <a:round/>
@@ -5224,7 +5079,7 @@
                       <a:tailEnd type="none" w="med" len="med"/>
                     </a:lnB>
                     <a:solidFill>
-                      <a:srgbClr val="18243A"/>
+                      <a:srgbClr val="F1F5F9"/>
                     </a:solidFill>
                   </a:tcPr>
                 </a:tc>
@@ -5241,7 +5096,7 @@
                       <a:r>
                         <a:rPr lang="en-US" sz="1200" dirty="0">
                           <a:solidFill>
-                            <a:srgbClr val="E6EDF3"/>
+                            <a:srgbClr val="1F2937"/>
                           </a:solidFill>
                         </a:rPr>
                         <a:t>Repeater</a:t>
@@ -5252,7 +5107,7 @@
                   <a:tcPr marL="76200" marR="76200" marT="38100" marB="38100" anchor="ctr">
                     <a:lnL w="12700" cap="flat" cmpd="sng" algn="ctr">
                       <a:solidFill>
-                        <a:srgbClr val="0E1726"/>
+                        <a:srgbClr val="FFFFFF"/>
                       </a:solidFill>
                       <a:prstDash val="solid"/>
                       <a:round/>
@@ -5261,7 +5116,7 @@
                     </a:lnL>
                     <a:lnR w="12700" cap="flat" cmpd="sng" algn="ctr">
                       <a:solidFill>
-                        <a:srgbClr val="0E1726"/>
+                        <a:srgbClr val="FFFFFF"/>
                       </a:solidFill>
                       <a:prstDash val="solid"/>
                       <a:round/>
@@ -5270,7 +5125,7 @@
                     </a:lnR>
                     <a:lnT w="12700" cap="flat" cmpd="sng" algn="ctr">
                       <a:solidFill>
-                        <a:srgbClr val="0E1726"/>
+                        <a:srgbClr val="FFFFFF"/>
                       </a:solidFill>
                       <a:prstDash val="solid"/>
                       <a:round/>
@@ -5279,7 +5134,7 @@
                     </a:lnT>
                     <a:lnB w="12700" cap="flat" cmpd="sng" algn="ctr">
                       <a:solidFill>
-                        <a:srgbClr val="0E1726"/>
+                        <a:srgbClr val="FFFFFF"/>
                       </a:solidFill>
                       <a:prstDash val="solid"/>
                       <a:round/>
@@ -5287,7 +5142,7 @@
                       <a:tailEnd type="none" w="med" len="med"/>
                     </a:lnB>
                     <a:solidFill>
-                      <a:srgbClr val="1E2B45"/>
+                      <a:srgbClr val="E8EDF3"/>
                     </a:solidFill>
                   </a:tcPr>
                 </a:tc>
@@ -5302,7 +5157,7 @@
                       <a:r>
                         <a:rPr lang="en-US" sz="1200" dirty="0">
                           <a:solidFill>
-                            <a:srgbClr val="E6EDF3"/>
+                            <a:srgbClr val="1F2937"/>
                           </a:solidFill>
                         </a:rPr>
                         <a:t>replay/tweak one request</a:t>
@@ -5313,7 +5168,7 @@
                   <a:tcPr marL="76200" marR="76200" marT="38100" marB="38100" anchor="ctr">
                     <a:lnL w="12700" cap="flat" cmpd="sng" algn="ctr">
                       <a:solidFill>
-                        <a:srgbClr val="0E1726"/>
+                        <a:srgbClr val="FFFFFF"/>
                       </a:solidFill>
                       <a:prstDash val="solid"/>
                       <a:round/>
@@ -5322,7 +5177,7 @@
                     </a:lnL>
                     <a:lnR w="12700" cap="flat" cmpd="sng" algn="ctr">
                       <a:solidFill>
-                        <a:srgbClr val="0E1726"/>
+                        <a:srgbClr val="FFFFFF"/>
                       </a:solidFill>
                       <a:prstDash val="solid"/>
                       <a:round/>
@@ -5331,7 +5186,7 @@
                     </a:lnR>
                     <a:lnT w="12700" cap="flat" cmpd="sng" algn="ctr">
                       <a:solidFill>
-                        <a:srgbClr val="0E1726"/>
+                        <a:srgbClr val="FFFFFF"/>
                       </a:solidFill>
                       <a:prstDash val="solid"/>
                       <a:round/>
@@ -5340,7 +5195,7 @@
                     </a:lnT>
                     <a:lnB w="12700" cap="flat" cmpd="sng" algn="ctr">
                       <a:solidFill>
-                        <a:srgbClr val="0E1726"/>
+                        <a:srgbClr val="FFFFFF"/>
                       </a:solidFill>
                       <a:prstDash val="solid"/>
                       <a:round/>
@@ -5348,7 +5203,7 @@
                       <a:tailEnd type="none" w="med" len="med"/>
                     </a:lnB>
                     <a:solidFill>
-                      <a:srgbClr val="1E2B45"/>
+                      <a:srgbClr val="E8EDF3"/>
                     </a:solidFill>
                   </a:tcPr>
                 </a:tc>
@@ -5365,7 +5220,7 @@
                       <a:r>
                         <a:rPr lang="en-US" sz="1200" dirty="0">
                           <a:solidFill>
-                            <a:srgbClr val="E6EDF3"/>
+                            <a:srgbClr val="1F2937"/>
                           </a:solidFill>
                         </a:rPr>
                         <a:t>Intruder</a:t>
@@ -5376,7 +5231,7 @@
                   <a:tcPr marL="76200" marR="76200" marT="38100" marB="38100" anchor="ctr">
                     <a:lnL w="12700" cap="flat" cmpd="sng" algn="ctr">
                       <a:solidFill>
-                        <a:srgbClr val="0E1726"/>
+                        <a:srgbClr val="FFFFFF"/>
                       </a:solidFill>
                       <a:prstDash val="solid"/>
                       <a:round/>
@@ -5385,7 +5240,7 @@
                     </a:lnL>
                     <a:lnR w="12700" cap="flat" cmpd="sng" algn="ctr">
                       <a:solidFill>
-                        <a:srgbClr val="0E1726"/>
+                        <a:srgbClr val="FFFFFF"/>
                       </a:solidFill>
                       <a:prstDash val="solid"/>
                       <a:round/>
@@ -5394,7 +5249,7 @@
                     </a:lnR>
                     <a:lnT w="12700" cap="flat" cmpd="sng" algn="ctr">
                       <a:solidFill>
-                        <a:srgbClr val="0E1726"/>
+                        <a:srgbClr val="FFFFFF"/>
                       </a:solidFill>
                       <a:prstDash val="solid"/>
                       <a:round/>
@@ -5403,7 +5258,7 @@
                     </a:lnT>
                     <a:lnB w="12700" cap="flat" cmpd="sng" algn="ctr">
                       <a:solidFill>
-                        <a:srgbClr val="0E1726"/>
+                        <a:srgbClr val="FFFFFF"/>
                       </a:solidFill>
                       <a:prstDash val="solid"/>
                       <a:round/>
@@ -5411,7 +5266,7 @@
                       <a:tailEnd type="none" w="med" len="med"/>
                     </a:lnB>
                     <a:solidFill>
-                      <a:srgbClr val="18243A"/>
+                      <a:srgbClr val="F1F5F9"/>
                     </a:solidFill>
                   </a:tcPr>
                 </a:tc>
@@ -5426,7 +5281,7 @@
                       <a:r>
                         <a:rPr lang="en-US" sz="1200" dirty="0">
                           <a:solidFill>
-                            <a:srgbClr val="E6EDF3"/>
+                            <a:srgbClr val="1F2937"/>
                           </a:solidFill>
                         </a:rPr>
                         <a:t>automate brute-force/fuzz</a:t>
@@ -5437,7 +5292,7 @@
                   <a:tcPr marL="76200" marR="76200" marT="38100" marB="38100" anchor="ctr">
                     <a:lnL w="12700" cap="flat" cmpd="sng" algn="ctr">
                       <a:solidFill>
-                        <a:srgbClr val="0E1726"/>
+                        <a:srgbClr val="FFFFFF"/>
                       </a:solidFill>
                       <a:prstDash val="solid"/>
                       <a:round/>
@@ -5446,7 +5301,7 @@
                     </a:lnL>
                     <a:lnR w="12700" cap="flat" cmpd="sng" algn="ctr">
                       <a:solidFill>
-                        <a:srgbClr val="0E1726"/>
+                        <a:srgbClr val="FFFFFF"/>
                       </a:solidFill>
                       <a:prstDash val="solid"/>
                       <a:round/>
@@ -5455,7 +5310,7 @@
                     </a:lnR>
                     <a:lnT w="12700" cap="flat" cmpd="sng" algn="ctr">
                       <a:solidFill>
-                        <a:srgbClr val="0E1726"/>
+                        <a:srgbClr val="FFFFFF"/>
                       </a:solidFill>
                       <a:prstDash val="solid"/>
                       <a:round/>
@@ -5464,7 +5319,7 @@
                     </a:lnT>
                     <a:lnB w="12700" cap="flat" cmpd="sng" algn="ctr">
                       <a:solidFill>
-                        <a:srgbClr val="0E1726"/>
+                        <a:srgbClr val="FFFFFF"/>
                       </a:solidFill>
                       <a:prstDash val="solid"/>
                       <a:round/>
@@ -5472,7 +5327,7 @@
                       <a:tailEnd type="none" w="med" len="med"/>
                     </a:lnB>
                     <a:solidFill>
-                      <a:srgbClr val="18243A"/>
+                      <a:srgbClr val="F1F5F9"/>
                     </a:solidFill>
                   </a:tcPr>
                 </a:tc>
@@ -5489,7 +5344,7 @@
                       <a:r>
                         <a:rPr lang="en-US" sz="1200" dirty="0">
                           <a:solidFill>
-                            <a:srgbClr val="E6EDF3"/>
+                            <a:srgbClr val="1F2937"/>
                           </a:solidFill>
                         </a:rPr>
                         <a:t>Decoder/Comparer</a:t>
@@ -5500,7 +5355,7 @@
                   <a:tcPr marL="76200" marR="76200" marT="38100" marB="38100" anchor="ctr">
                     <a:lnL w="12700" cap="flat" cmpd="sng" algn="ctr">
                       <a:solidFill>
-                        <a:srgbClr val="0E1726"/>
+                        <a:srgbClr val="FFFFFF"/>
                       </a:solidFill>
                       <a:prstDash val="solid"/>
                       <a:round/>
@@ -5509,7 +5364,7 @@
                     </a:lnL>
                     <a:lnR w="12700" cap="flat" cmpd="sng" algn="ctr">
                       <a:solidFill>
-                        <a:srgbClr val="0E1726"/>
+                        <a:srgbClr val="FFFFFF"/>
                       </a:solidFill>
                       <a:prstDash val="solid"/>
                       <a:round/>
@@ -5518,7 +5373,7 @@
                     </a:lnR>
                     <a:lnT w="12700" cap="flat" cmpd="sng" algn="ctr">
                       <a:solidFill>
-                        <a:srgbClr val="0E1726"/>
+                        <a:srgbClr val="FFFFFF"/>
                       </a:solidFill>
                       <a:prstDash val="solid"/>
                       <a:round/>
@@ -5527,7 +5382,7 @@
                     </a:lnT>
                     <a:lnB w="12700" cap="flat" cmpd="sng" algn="ctr">
                       <a:solidFill>
-                        <a:srgbClr val="0E1726"/>
+                        <a:srgbClr val="FFFFFF"/>
                       </a:solidFill>
                       <a:prstDash val="solid"/>
                       <a:round/>
@@ -5535,7 +5390,7 @@
                       <a:tailEnd type="none" w="med" len="med"/>
                     </a:lnB>
                     <a:solidFill>
-                      <a:srgbClr val="1E2B45"/>
+                      <a:srgbClr val="E8EDF3"/>
                     </a:solidFill>
                   </a:tcPr>
                 </a:tc>
@@ -5550,7 +5405,7 @@
                       <a:r>
                         <a:rPr lang="en-US" sz="1200" dirty="0">
                           <a:solidFill>
-                            <a:srgbClr val="E6EDF3"/>
+                            <a:srgbClr val="1F2937"/>
                           </a:solidFill>
                         </a:rPr>
                         <a:t>encode payloads / diff responses</a:t>
@@ -5561,7 +5416,7 @@
                   <a:tcPr marL="76200" marR="76200" marT="38100" marB="38100" anchor="ctr">
                     <a:lnL w="12700" cap="flat" cmpd="sng" algn="ctr">
                       <a:solidFill>
-                        <a:srgbClr val="0E1726"/>
+                        <a:srgbClr val="FFFFFF"/>
                       </a:solidFill>
                       <a:prstDash val="solid"/>
                       <a:round/>
@@ -5570,7 +5425,7 @@
                     </a:lnL>
                     <a:lnR w="12700" cap="flat" cmpd="sng" algn="ctr">
                       <a:solidFill>
-                        <a:srgbClr val="0E1726"/>
+                        <a:srgbClr val="FFFFFF"/>
                       </a:solidFill>
                       <a:prstDash val="solid"/>
                       <a:round/>
@@ -5579,7 +5434,7 @@
                     </a:lnR>
                     <a:lnT w="12700" cap="flat" cmpd="sng" algn="ctr">
                       <a:solidFill>
-                        <a:srgbClr val="0E1726"/>
+                        <a:srgbClr val="FFFFFF"/>
                       </a:solidFill>
                       <a:prstDash val="solid"/>
                       <a:round/>
@@ -5588,7 +5443,7 @@
                     </a:lnT>
                     <a:lnB w="12700" cap="flat" cmpd="sng" algn="ctr">
                       <a:solidFill>
-                        <a:srgbClr val="0E1726"/>
+                        <a:srgbClr val="FFFFFF"/>
                       </a:solidFill>
                       <a:prstDash val="solid"/>
                       <a:round/>
@@ -5596,7 +5451,7 @@
                       <a:tailEnd type="none" w="med" len="med"/>
                     </a:lnB>
                     <a:solidFill>
-                      <a:srgbClr val="1E2B45"/>
+                      <a:srgbClr val="E8EDF3"/>
                     </a:solidFill>
                   </a:tcPr>
                 </a:tc>
@@ -5622,13 +5477,13 @@
             </a:avLst>
           </a:prstGeom>
           <a:solidFill>
-            <a:srgbClr val="18243A"/>
+            <a:srgbClr val="F1F5F9"/>
           </a:solidFill>
           <a:ln/>
           <a:effectLst>
-            <a:outerShdw sx="100000" sy="100000" kx="0" ky="0" algn="bl" rotWithShape="0" blurRad="101600" dist="38100" dir="5400000">
+            <a:outerShdw sx="100000" sy="100000" kx="0" ky="0" algn="bl" rotWithShape="0" blurRad="76200" dist="25400" dir="5400000">
               <a:srgbClr val="000000">
-                <a:alpha val="35000"/>
+                <a:alpha val="12000"/>
               </a:srgbClr>
             </a:outerShdw>
           </a:effectLst>
@@ -5665,7 +5520,7 @@
             <a:r>
               <a:rPr lang="en-US" sz="1400" dirty="0">
                 <a:solidFill>
-                  <a:srgbClr val="E6EDF3"/>
+                  <a:srgbClr val="1F2937"/>
                 </a:solidFill>
                 <a:latin typeface="Calibri" pitchFamily="34" charset="0"/>
                 <a:ea typeface="Calibri" pitchFamily="34" charset="-122"/>
@@ -5686,7 +5541,7 @@
             <a:r>
               <a:rPr lang="en-US" sz="1400" dirty="0">
                 <a:solidFill>
-                  <a:srgbClr val="E6EDF3"/>
+                  <a:srgbClr val="1F2937"/>
                 </a:solidFill>
                 <a:latin typeface="Calibri" pitchFamily="34" charset="0"/>
                 <a:ea typeface="Calibri" pitchFamily="34" charset="-122"/>
@@ -5725,7 +5580,7 @@
             <a:r>
               <a:rPr lang="en-US" sz="900" dirty="0">
                 <a:solidFill>
-                  <a:srgbClr val="94A3B8"/>
+                  <a:srgbClr val="64748B"/>
                 </a:solidFill>
                 <a:latin typeface="Calibri" pitchFamily="34" charset="0"/>
                 <a:ea typeface="Calibri" pitchFamily="34" charset="-122"/>
@@ -5737,38 +5592,9 @@
           </a:p>
         </p:txBody>
       </p:sp>
-      <p:sp>
-        <p:nvSpPr>
-          <p:cNvPr id="9" name="Shape 5"/>
-          <p:cNvSpPr/>
-          <p:nvPr/>
-        </p:nvSpPr>
-        <p:spPr>
-          <a:xfrm>
-            <a:off x="7772400" y="4590288"/>
-            <a:ext cx="969264" cy="475488"/>
-          </a:xfrm>
-          <a:prstGeom prst="roundRect">
-            <a:avLst>
-              <a:gd name="adj" fmla="val 11538"/>
-            </a:avLst>
-          </a:prstGeom>
-          <a:solidFill>
-            <a:srgbClr val="FFFFFF"/>
-          </a:solidFill>
-          <a:ln/>
-          <a:effectLst>
-            <a:outerShdw sx="100000" sy="100000" kx="0" ky="0" algn="bl" rotWithShape="0" blurRad="101600" dist="38100" dir="5400000">
-              <a:srgbClr val="000000">
-                <a:alpha val="35000"/>
-              </a:srgbClr>
-            </a:outerShdw>
-          </a:effectLst>
-        </p:spPr>
-      </p:sp>
       <p:pic>
         <p:nvPicPr>
-          <p:cNvPr id="10" name="Image 1" descr="/Users/pop7/Library/CloudStorage/OneDrive-MonsterConnectCo.,Ltd/Lecture/KOSEN69 - software-security/slides/pptx/assets/logo-small.png">    </p:cNvPr>
+          <p:cNvPr id="9" name="Image 1" descr="/Users/pop7/Library/CloudStorage/OneDrive-MonsterConnectCo.,Ltd/Lecture/KOSEN69 - software-security/slides/pptx/assets/logo-small.png">    </p:cNvPr>
           <p:cNvPicPr>
             <a:picLocks noChangeAspect="1"/>
           </p:cNvPicPr>
@@ -5782,7 +5608,7 @@
         </p:blipFill>
         <p:spPr>
           <a:xfrm>
-            <a:off x="7872984" y="4681728"/>
+            <a:off x="7882128" y="4700016"/>
             <a:ext cx="768096" cy="356616"/>
           </a:xfrm>
           <a:prstGeom prst="rect">
@@ -5804,7 +5630,7 @@
     <p:bg>
       <p:bgPr>
         <a:solidFill>
-          <a:srgbClr val="0E1726"/>
+          <a:srgbClr val="FFFFFF"/>
         </a:solidFill>
       </p:bgPr>
     </p:bg>
@@ -5841,9 +5667,9 @@
           </a:solidFill>
           <a:ln/>
           <a:effectLst>
-            <a:outerShdw sx="100000" sy="100000" kx="0" ky="0" algn="bl" rotWithShape="0" blurRad="101600" dist="38100" dir="5400000">
+            <a:outerShdw sx="100000" sy="100000" kx="0" ky="0" algn="bl" rotWithShape="0" blurRad="76200" dist="25400" dir="5400000">
               <a:srgbClr val="000000">
-                <a:alpha val="35000"/>
+                <a:alpha val="12000"/>
               </a:srgbClr>
             </a:outerShdw>
           </a:effectLst>
@@ -5900,7 +5726,7 @@
             <a:r>
               <a:rPr lang="en-US" sz="2600" b="1" dirty="0">
                 <a:solidFill>
-                  <a:srgbClr val="E6EDF3"/>
+                  <a:srgbClr val="1F2937"/>
                 </a:solidFill>
                 <a:latin typeface="Arial" pitchFamily="34" charset="0"/>
                 <a:ea typeface="Arial" pitchFamily="34" charset="-122"/>
@@ -5998,7 +5824,7 @@
             <a:r>
               <a:rPr lang="en-US" sz="1350" dirty="0">
                 <a:solidFill>
-                  <a:srgbClr val="E6EDF3"/>
+                  <a:srgbClr val="1F2937"/>
                 </a:solidFill>
                 <a:latin typeface="Calibri" pitchFamily="34" charset="0"/>
                 <a:ea typeface="Calibri" pitchFamily="34" charset="-122"/>
@@ -6096,7 +5922,7 @@
             <a:r>
               <a:rPr lang="en-US" sz="1350" dirty="0">
                 <a:solidFill>
-                  <a:srgbClr val="E6EDF3"/>
+                  <a:srgbClr val="1F2937"/>
                 </a:solidFill>
                 <a:latin typeface="Calibri" pitchFamily="34" charset="0"/>
                 <a:ea typeface="Calibri" pitchFamily="34" charset="-122"/>
@@ -6194,7 +6020,7 @@
             <a:r>
               <a:rPr lang="en-US" sz="1350" dirty="0">
                 <a:solidFill>
-                  <a:srgbClr val="E6EDF3"/>
+                  <a:srgbClr val="1F2937"/>
                 </a:solidFill>
                 <a:latin typeface="Calibri" pitchFamily="34" charset="0"/>
                 <a:ea typeface="Calibri" pitchFamily="34" charset="-122"/>
@@ -6233,7 +6059,7 @@
             <a:r>
               <a:rPr lang="en-US" sz="900" dirty="0">
                 <a:solidFill>
-                  <a:srgbClr val="94A3B8"/>
+                  <a:srgbClr val="64748B"/>
                 </a:solidFill>
                 <a:latin typeface="Calibri" pitchFamily="34" charset="0"/>
                 <a:ea typeface="Calibri" pitchFamily="34" charset="-122"/>
@@ -6245,38 +6071,9 @@
           </a:p>
         </p:txBody>
       </p:sp>
-      <p:sp>
-        <p:nvSpPr>
-          <p:cNvPr id="15" name="Shape 12"/>
-          <p:cNvSpPr/>
-          <p:nvPr/>
-        </p:nvSpPr>
-        <p:spPr>
-          <a:xfrm>
-            <a:off x="7772400" y="4590288"/>
-            <a:ext cx="969264" cy="475488"/>
-          </a:xfrm>
-          <a:prstGeom prst="roundRect">
-            <a:avLst>
-              <a:gd name="adj" fmla="val 11538"/>
-            </a:avLst>
-          </a:prstGeom>
-          <a:solidFill>
-            <a:srgbClr val="FFFFFF"/>
-          </a:solidFill>
-          <a:ln/>
-          <a:effectLst>
-            <a:outerShdw sx="100000" sy="100000" kx="0" ky="0" algn="bl" rotWithShape="0" blurRad="101600" dist="38100" dir="5400000">
-              <a:srgbClr val="000000">
-                <a:alpha val="35000"/>
-              </a:srgbClr>
-            </a:outerShdw>
-          </a:effectLst>
-        </p:spPr>
-      </p:sp>
       <p:pic>
         <p:nvPicPr>
-          <p:cNvPr id="16" name="Image 1" descr="/Users/pop7/Library/CloudStorage/OneDrive-MonsterConnectCo.,Ltd/Lecture/KOSEN69 - software-security/slides/pptx/assets/logo-small.png">    </p:cNvPr>
+          <p:cNvPr id="15" name="Image 1" descr="/Users/pop7/Library/CloudStorage/OneDrive-MonsterConnectCo.,Ltd/Lecture/KOSEN69 - software-security/slides/pptx/assets/logo-small.png">    </p:cNvPr>
           <p:cNvPicPr>
             <a:picLocks noChangeAspect="1"/>
           </p:cNvPicPr>
@@ -6290,7 +6087,7 @@
         </p:blipFill>
         <p:spPr>
           <a:xfrm>
-            <a:off x="7872984" y="4681728"/>
+            <a:off x="7882128" y="4700016"/>
             <a:ext cx="768096" cy="356616"/>
           </a:xfrm>
           <a:prstGeom prst="rect">
@@ -6312,7 +6109,7 @@
     <p:bg>
       <p:bgPr>
         <a:solidFill>
-          <a:srgbClr val="0E1726"/>
+          <a:srgbClr val="FFFFFF"/>
         </a:solidFill>
       </p:bgPr>
     </p:bg>
@@ -6349,9 +6146,9 @@
           </a:solidFill>
           <a:ln/>
           <a:effectLst>
-            <a:outerShdw sx="100000" sy="100000" kx="0" ky="0" algn="bl" rotWithShape="0" blurRad="101600" dist="38100" dir="5400000">
+            <a:outerShdw sx="100000" sy="100000" kx="0" ky="0" algn="bl" rotWithShape="0" blurRad="76200" dist="25400" dir="5400000">
               <a:srgbClr val="000000">
-                <a:alpha val="35000"/>
+                <a:alpha val="12000"/>
               </a:srgbClr>
             </a:outerShdw>
           </a:effectLst>
@@ -6408,7 +6205,7 @@
             <a:r>
               <a:rPr lang="en-US" sz="2600" b="1" dirty="0">
                 <a:solidFill>
-                  <a:srgbClr val="E6EDF3"/>
+                  <a:srgbClr val="1F2937"/>
                 </a:solidFill>
                 <a:latin typeface="Arial" pitchFamily="34" charset="0"/>
                 <a:ea typeface="Arial" pitchFamily="34" charset="-122"/>
@@ -6506,7 +6303,7 @@
             <a:r>
               <a:rPr lang="en-US" sz="1350" dirty="0">
                 <a:solidFill>
-                  <a:srgbClr val="E6EDF3"/>
+                  <a:srgbClr val="1F2937"/>
                 </a:solidFill>
                 <a:latin typeface="Calibri" pitchFamily="34" charset="0"/>
                 <a:ea typeface="Calibri" pitchFamily="34" charset="-122"/>
@@ -6604,7 +6401,7 @@
             <a:r>
               <a:rPr lang="en-US" sz="1350" dirty="0">
                 <a:solidFill>
-                  <a:srgbClr val="E6EDF3"/>
+                  <a:srgbClr val="1F2937"/>
                 </a:solidFill>
                 <a:latin typeface="Calibri" pitchFamily="34" charset="0"/>
                 <a:ea typeface="Calibri" pitchFamily="34" charset="-122"/>
@@ -6702,7 +6499,7 @@
             <a:r>
               <a:rPr lang="en-US" sz="1350" dirty="0">
                 <a:solidFill>
-                  <a:srgbClr val="E6EDF3"/>
+                  <a:srgbClr val="1F2937"/>
                 </a:solidFill>
                 <a:latin typeface="Calibri" pitchFamily="34" charset="0"/>
                 <a:ea typeface="Calibri" pitchFamily="34" charset="-122"/>
@@ -6800,7 +6597,7 @@
             <a:r>
               <a:rPr lang="en-US" sz="1350" dirty="0">
                 <a:solidFill>
-                  <a:srgbClr val="E6EDF3"/>
+                  <a:srgbClr val="1F2937"/>
                 </a:solidFill>
                 <a:latin typeface="Calibri" pitchFamily="34" charset="0"/>
                 <a:ea typeface="Calibri" pitchFamily="34" charset="-122"/>
@@ -6839,7 +6636,7 @@
             <a:r>
               <a:rPr lang="en-US" sz="900" dirty="0">
                 <a:solidFill>
-                  <a:srgbClr val="94A3B8"/>
+                  <a:srgbClr val="64748B"/>
                 </a:solidFill>
                 <a:latin typeface="Calibri" pitchFamily="34" charset="0"/>
                 <a:ea typeface="Calibri" pitchFamily="34" charset="-122"/>
@@ -6851,38 +6648,9 @@
           </a:p>
         </p:txBody>
       </p:sp>
-      <p:sp>
-        <p:nvSpPr>
-          <p:cNvPr id="18" name="Shape 15"/>
-          <p:cNvSpPr/>
-          <p:nvPr/>
-        </p:nvSpPr>
-        <p:spPr>
-          <a:xfrm>
-            <a:off x="7772400" y="4590288"/>
-            <a:ext cx="969264" cy="475488"/>
-          </a:xfrm>
-          <a:prstGeom prst="roundRect">
-            <a:avLst>
-              <a:gd name="adj" fmla="val 11538"/>
-            </a:avLst>
-          </a:prstGeom>
-          <a:solidFill>
-            <a:srgbClr val="FFFFFF"/>
-          </a:solidFill>
-          <a:ln/>
-          <a:effectLst>
-            <a:outerShdw sx="100000" sy="100000" kx="0" ky="0" algn="bl" rotWithShape="0" blurRad="101600" dist="38100" dir="5400000">
-              <a:srgbClr val="000000">
-                <a:alpha val="35000"/>
-              </a:srgbClr>
-            </a:outerShdw>
-          </a:effectLst>
-        </p:spPr>
-      </p:sp>
       <p:pic>
         <p:nvPicPr>
-          <p:cNvPr id="19" name="Image 1" descr="/Users/pop7/Library/CloudStorage/OneDrive-MonsterConnectCo.,Ltd/Lecture/KOSEN69 - software-security/slides/pptx/assets/logo-small.png">    </p:cNvPr>
+          <p:cNvPr id="18" name="Image 1" descr="/Users/pop7/Library/CloudStorage/OneDrive-MonsterConnectCo.,Ltd/Lecture/KOSEN69 - software-security/slides/pptx/assets/logo-small.png">    </p:cNvPr>
           <p:cNvPicPr>
             <a:picLocks noChangeAspect="1"/>
           </p:cNvPicPr>
@@ -6896,7 +6664,7 @@
         </p:blipFill>
         <p:spPr>
           <a:xfrm>
-            <a:off x="7872984" y="4681728"/>
+            <a:off x="7882128" y="4700016"/>
             <a:ext cx="768096" cy="356616"/>
           </a:xfrm>
           <a:prstGeom prst="rect">
@@ -6918,7 +6686,7 @@
     <p:bg>
       <p:bgPr>
         <a:solidFill>
-          <a:srgbClr val="0E1726"/>
+          <a:srgbClr val="FFFFFF"/>
         </a:solidFill>
       </p:bgPr>
     </p:bg>
@@ -6955,9 +6723,9 @@
           </a:solidFill>
           <a:ln/>
           <a:effectLst>
-            <a:outerShdw sx="100000" sy="100000" kx="0" ky="0" algn="bl" rotWithShape="0" blurRad="101600" dist="38100" dir="5400000">
+            <a:outerShdw sx="100000" sy="100000" kx="0" ky="0" algn="bl" rotWithShape="0" blurRad="76200" dist="25400" dir="5400000">
               <a:srgbClr val="000000">
-                <a:alpha val="35000"/>
+                <a:alpha val="12000"/>
               </a:srgbClr>
             </a:outerShdw>
           </a:effectLst>
@@ -7014,7 +6782,7 @@
             <a:r>
               <a:rPr lang="en-US" sz="2600" b="1" dirty="0">
                 <a:solidFill>
-                  <a:srgbClr val="E6EDF3"/>
+                  <a:srgbClr val="1F2937"/>
                 </a:solidFill>
                 <a:latin typeface="Arial" pitchFamily="34" charset="0"/>
                 <a:ea typeface="Arial" pitchFamily="34" charset="-122"/>
@@ -7043,13 +6811,13 @@
             </a:avLst>
           </a:prstGeom>
           <a:solidFill>
-            <a:srgbClr val="18243A"/>
+            <a:srgbClr val="F1F5F9"/>
           </a:solidFill>
           <a:ln/>
           <a:effectLst>
-            <a:outerShdw sx="100000" sy="100000" kx="0" ky="0" algn="bl" rotWithShape="0" blurRad="101600" dist="38100" dir="5400000">
+            <a:outerShdw sx="100000" sy="100000" kx="0" ky="0" algn="bl" rotWithShape="0" blurRad="76200" dist="25400" dir="5400000">
               <a:srgbClr val="000000">
-                <a:alpha val="35000"/>
+                <a:alpha val="12000"/>
               </a:srgbClr>
             </a:outerShdw>
           </a:effectLst>
@@ -7086,7 +6854,7 @@
             <a:r>
               <a:rPr lang="en-US" sz="1400" dirty="0">
                 <a:solidFill>
-                  <a:srgbClr val="E6EDF3"/>
+                  <a:srgbClr val="1F2937"/>
                 </a:solidFill>
                 <a:latin typeface="Calibri" pitchFamily="34" charset="0"/>
                 <a:ea typeface="Calibri" pitchFamily="34" charset="-122"/>
@@ -7107,7 +6875,7 @@
             <a:r>
               <a:rPr lang="en-US" sz="1400" dirty="0">
                 <a:solidFill>
-                  <a:srgbClr val="E6EDF3"/>
+                  <a:srgbClr val="1F2937"/>
                 </a:solidFill>
                 <a:latin typeface="Calibri" pitchFamily="34" charset="0"/>
                 <a:ea typeface="Calibri" pitchFamily="34" charset="-122"/>
@@ -7128,7 +6896,7 @@
             <a:r>
               <a:rPr lang="en-US" sz="1400" dirty="0">
                 <a:solidFill>
-                  <a:srgbClr val="E6EDF3"/>
+                  <a:srgbClr val="1F2937"/>
                 </a:solidFill>
                 <a:latin typeface="Calibri" pitchFamily="34" charset="0"/>
                 <a:ea typeface="Calibri" pitchFamily="34" charset="-122"/>
@@ -7167,7 +6935,7 @@
             <a:r>
               <a:rPr lang="en-US" sz="900" dirty="0">
                 <a:solidFill>
-                  <a:srgbClr val="94A3B8"/>
+                  <a:srgbClr val="64748B"/>
                 </a:solidFill>
                 <a:latin typeface="Calibri" pitchFamily="34" charset="0"/>
                 <a:ea typeface="Calibri" pitchFamily="34" charset="-122"/>
@@ -7179,38 +6947,9 @@
           </a:p>
         </p:txBody>
       </p:sp>
-      <p:sp>
-        <p:nvSpPr>
-          <p:cNvPr id="8" name="Shape 5"/>
-          <p:cNvSpPr/>
-          <p:nvPr/>
-        </p:nvSpPr>
-        <p:spPr>
-          <a:xfrm>
-            <a:off x="7772400" y="4590288"/>
-            <a:ext cx="969264" cy="475488"/>
-          </a:xfrm>
-          <a:prstGeom prst="roundRect">
-            <a:avLst>
-              <a:gd name="adj" fmla="val 11538"/>
-            </a:avLst>
-          </a:prstGeom>
-          <a:solidFill>
-            <a:srgbClr val="FFFFFF"/>
-          </a:solidFill>
-          <a:ln/>
-          <a:effectLst>
-            <a:outerShdw sx="100000" sy="100000" kx="0" ky="0" algn="bl" rotWithShape="0" blurRad="101600" dist="38100" dir="5400000">
-              <a:srgbClr val="000000">
-                <a:alpha val="35000"/>
-              </a:srgbClr>
-            </a:outerShdw>
-          </a:effectLst>
-        </p:spPr>
-      </p:sp>
       <p:pic>
         <p:nvPicPr>
-          <p:cNvPr id="9" name="Image 1" descr="/Users/pop7/Library/CloudStorage/OneDrive-MonsterConnectCo.,Ltd/Lecture/KOSEN69 - software-security/slides/pptx/assets/logo-small.png">    </p:cNvPr>
+          <p:cNvPr id="8" name="Image 1" descr="/Users/pop7/Library/CloudStorage/OneDrive-MonsterConnectCo.,Ltd/Lecture/KOSEN69 - software-security/slides/pptx/assets/logo-small.png">    </p:cNvPr>
           <p:cNvPicPr>
             <a:picLocks noChangeAspect="1"/>
           </p:cNvPicPr>
@@ -7224,7 +6963,7 @@
         </p:blipFill>
         <p:spPr>
           <a:xfrm>
-            <a:off x="7872984" y="4681728"/>
+            <a:off x="7882128" y="4700016"/>
             <a:ext cx="768096" cy="356616"/>
           </a:xfrm>
           <a:prstGeom prst="rect">
@@ -7246,7 +6985,7 @@
     <p:bg>
       <p:bgPr>
         <a:solidFill>
-          <a:srgbClr val="0E1726"/>
+          <a:srgbClr val="FFFFFF"/>
         </a:solidFill>
       </p:bgPr>
     </p:bg>
@@ -7283,9 +7022,9 @@
           </a:solidFill>
           <a:ln/>
           <a:effectLst>
-            <a:outerShdw sx="100000" sy="100000" kx="0" ky="0" algn="bl" rotWithShape="0" blurRad="101600" dist="38100" dir="5400000">
+            <a:outerShdw sx="100000" sy="100000" kx="0" ky="0" algn="bl" rotWithShape="0" blurRad="76200" dist="25400" dir="5400000">
               <a:srgbClr val="000000">
-                <a:alpha val="35000"/>
+                <a:alpha val="12000"/>
               </a:srgbClr>
             </a:outerShdw>
           </a:effectLst>
@@ -7342,7 +7081,7 @@
             <a:r>
               <a:rPr lang="en-US" sz="2600" b="1" dirty="0">
                 <a:solidFill>
-                  <a:srgbClr val="E6EDF3"/>
+                  <a:srgbClr val="1F2937"/>
                 </a:solidFill>
                 <a:latin typeface="Arial" pitchFamily="34" charset="0"/>
                 <a:ea typeface="Arial" pitchFamily="34" charset="-122"/>
@@ -7371,13 +7110,13 @@
             </a:avLst>
           </a:prstGeom>
           <a:solidFill>
-            <a:srgbClr val="18243A"/>
+            <a:srgbClr val="F1F5F9"/>
           </a:solidFill>
           <a:ln/>
           <a:effectLst>
-            <a:outerShdw sx="100000" sy="100000" kx="0" ky="0" algn="bl" rotWithShape="0" blurRad="101600" dist="38100" dir="5400000">
+            <a:outerShdw sx="100000" sy="100000" kx="0" ky="0" algn="bl" rotWithShape="0" blurRad="76200" dist="25400" dir="5400000">
               <a:srgbClr val="000000">
-                <a:alpha val="35000"/>
+                <a:alpha val="12000"/>
               </a:srgbClr>
             </a:outerShdw>
           </a:effectLst>
@@ -7414,7 +7153,7 @@
             <a:r>
               <a:rPr lang="en-US" sz="1400" dirty="0">
                 <a:solidFill>
-                  <a:srgbClr val="E6EDF3"/>
+                  <a:srgbClr val="1F2937"/>
                 </a:solidFill>
                 <a:latin typeface="Calibri" pitchFamily="34" charset="0"/>
                 <a:ea typeface="Calibri" pitchFamily="34" charset="-122"/>
@@ -7435,7 +7174,7 @@
             <a:r>
               <a:rPr lang="en-US" sz="1400" dirty="0">
                 <a:solidFill>
-                  <a:srgbClr val="E6EDF3"/>
+                  <a:srgbClr val="1F2937"/>
                 </a:solidFill>
                 <a:latin typeface="Calibri" pitchFamily="34" charset="0"/>
                 <a:ea typeface="Calibri" pitchFamily="34" charset="-122"/>
@@ -7456,7 +7195,7 @@
             <a:r>
               <a:rPr lang="en-US" sz="1400" dirty="0">
                 <a:solidFill>
-                  <a:srgbClr val="E6EDF3"/>
+                  <a:srgbClr val="1F2937"/>
                 </a:solidFill>
                 <a:latin typeface="Calibri" pitchFamily="34" charset="0"/>
                 <a:ea typeface="Calibri" pitchFamily="34" charset="-122"/>
@@ -7495,7 +7234,7 @@
             <a:r>
               <a:rPr lang="en-US" sz="900" dirty="0">
                 <a:solidFill>
-                  <a:srgbClr val="94A3B8"/>
+                  <a:srgbClr val="64748B"/>
                 </a:solidFill>
                 <a:latin typeface="Calibri" pitchFamily="34" charset="0"/>
                 <a:ea typeface="Calibri" pitchFamily="34" charset="-122"/>
@@ -7507,38 +7246,9 @@
           </a:p>
         </p:txBody>
       </p:sp>
-      <p:sp>
-        <p:nvSpPr>
-          <p:cNvPr id="8" name="Shape 5"/>
-          <p:cNvSpPr/>
-          <p:nvPr/>
-        </p:nvSpPr>
-        <p:spPr>
-          <a:xfrm>
-            <a:off x="7772400" y="4590288"/>
-            <a:ext cx="969264" cy="475488"/>
-          </a:xfrm>
-          <a:prstGeom prst="roundRect">
-            <a:avLst>
-              <a:gd name="adj" fmla="val 11538"/>
-            </a:avLst>
-          </a:prstGeom>
-          <a:solidFill>
-            <a:srgbClr val="FFFFFF"/>
-          </a:solidFill>
-          <a:ln/>
-          <a:effectLst>
-            <a:outerShdw sx="100000" sy="100000" kx="0" ky="0" algn="bl" rotWithShape="0" blurRad="101600" dist="38100" dir="5400000">
-              <a:srgbClr val="000000">
-                <a:alpha val="35000"/>
-              </a:srgbClr>
-            </a:outerShdw>
-          </a:effectLst>
-        </p:spPr>
-      </p:sp>
       <p:pic>
         <p:nvPicPr>
-          <p:cNvPr id="9" name="Image 1" descr="/Users/pop7/Library/CloudStorage/OneDrive-MonsterConnectCo.,Ltd/Lecture/KOSEN69 - software-security/slides/pptx/assets/logo-small.png">    </p:cNvPr>
+          <p:cNvPr id="8" name="Image 1" descr="/Users/pop7/Library/CloudStorage/OneDrive-MonsterConnectCo.,Ltd/Lecture/KOSEN69 - software-security/slides/pptx/assets/logo-small.png">    </p:cNvPr>
           <p:cNvPicPr>
             <a:picLocks noChangeAspect="1"/>
           </p:cNvPicPr>
@@ -7552,7 +7262,7 @@
         </p:blipFill>
         <p:spPr>
           <a:xfrm>
-            <a:off x="7872984" y="4681728"/>
+            <a:off x="7882128" y="4700016"/>
             <a:ext cx="768096" cy="356616"/>
           </a:xfrm>
           <a:prstGeom prst="rect">
@@ -7574,7 +7284,7 @@
     <p:bg>
       <p:bgPr>
         <a:solidFill>
-          <a:srgbClr val="0E1726"/>
+          <a:srgbClr val="FFFFFF"/>
         </a:solidFill>
       </p:bgPr>
     </p:bg>
@@ -7619,7 +7329,7 @@
             <a:r>
               <a:rPr lang="en-US" sz="4600" b="1" dirty="0">
                 <a:solidFill>
-                  <a:srgbClr val="E6EDF3"/>
+                  <a:srgbClr val="1F2937"/>
                 </a:solidFill>
                 <a:latin typeface="Arial" pitchFamily="34" charset="0"/>
                 <a:ea typeface="Arial" pitchFamily="34" charset="-122"/>
@@ -7670,38 +7380,9 @@
           </a:p>
         </p:txBody>
       </p:sp>
-      <p:sp>
-        <p:nvSpPr>
-          <p:cNvPr id="4" name="Shape 2"/>
-          <p:cNvSpPr/>
-          <p:nvPr/>
-        </p:nvSpPr>
-        <p:spPr>
-          <a:xfrm>
-            <a:off x="7772400" y="4590288"/>
-            <a:ext cx="969264" cy="475488"/>
-          </a:xfrm>
-          <a:prstGeom prst="roundRect">
-            <a:avLst>
-              <a:gd name="adj" fmla="val 11538"/>
-            </a:avLst>
-          </a:prstGeom>
-          <a:solidFill>
-            <a:srgbClr val="FFFFFF"/>
-          </a:solidFill>
-          <a:ln/>
-          <a:effectLst>
-            <a:outerShdw sx="100000" sy="100000" kx="0" ky="0" algn="bl" rotWithShape="0" blurRad="101600" dist="38100" dir="5400000">
-              <a:srgbClr val="000000">
-                <a:alpha val="35000"/>
-              </a:srgbClr>
-            </a:outerShdw>
-          </a:effectLst>
-        </p:spPr>
-      </p:sp>
       <p:pic>
         <p:nvPicPr>
-          <p:cNvPr id="5" name="Image 0" descr="/Users/pop7/Library/CloudStorage/OneDrive-MonsterConnectCo.,Ltd/Lecture/KOSEN69 - software-security/slides/pptx/assets/logo-small.png">    </p:cNvPr>
+          <p:cNvPr id="4" name="Image 0" descr="/Users/pop7/Library/CloudStorage/OneDrive-MonsterConnectCo.,Ltd/Lecture/KOSEN69 - software-security/slides/pptx/assets/logo-small.png">    </p:cNvPr>
           <p:cNvPicPr>
             <a:picLocks noChangeAspect="1"/>
           </p:cNvPicPr>
@@ -7715,7 +7396,7 @@
         </p:blipFill>
         <p:spPr>
           <a:xfrm>
-            <a:off x="7872984" y="4681728"/>
+            <a:off x="7882128" y="4700016"/>
             <a:ext cx="768096" cy="356616"/>
           </a:xfrm>
           <a:prstGeom prst="rect">
@@ -7737,7 +7418,7 @@
     <p:bg>
       <p:bgPr>
         <a:solidFill>
-          <a:srgbClr val="0E1726"/>
+          <a:srgbClr val="FFFFFF"/>
         </a:solidFill>
       </p:bgPr>
     </p:bg>
@@ -7774,9 +7455,9 @@
           </a:solidFill>
           <a:ln/>
           <a:effectLst>
-            <a:outerShdw sx="100000" sy="100000" kx="0" ky="0" algn="bl" rotWithShape="0" blurRad="101600" dist="38100" dir="5400000">
+            <a:outerShdw sx="100000" sy="100000" kx="0" ky="0" algn="bl" rotWithShape="0" blurRad="76200" dist="25400" dir="5400000">
               <a:srgbClr val="000000">
-                <a:alpha val="35000"/>
+                <a:alpha val="12000"/>
               </a:srgbClr>
             </a:outerShdw>
           </a:effectLst>
@@ -7833,7 +7514,7 @@
             <a:r>
               <a:rPr lang="en-US" sz="2600" b="1" dirty="0">
                 <a:solidFill>
-                  <a:srgbClr val="E6EDF3"/>
+                  <a:srgbClr val="1F2937"/>
                 </a:solidFill>
                 <a:latin typeface="Arial" pitchFamily="34" charset="0"/>
                 <a:ea typeface="Arial" pitchFamily="34" charset="-122"/>
@@ -7862,13 +7543,13 @@
             </a:avLst>
           </a:prstGeom>
           <a:solidFill>
-            <a:srgbClr val="18243A"/>
+            <a:srgbClr val="F1F5F9"/>
           </a:solidFill>
           <a:ln/>
           <a:effectLst>
-            <a:outerShdw sx="100000" sy="100000" kx="0" ky="0" algn="bl" rotWithShape="0" blurRad="101600" dist="38100" dir="5400000">
+            <a:outerShdw sx="100000" sy="100000" kx="0" ky="0" algn="bl" rotWithShape="0" blurRad="76200" dist="25400" dir="5400000">
               <a:srgbClr val="000000">
-                <a:alpha val="35000"/>
+                <a:alpha val="12000"/>
               </a:srgbClr>
             </a:outerShdw>
           </a:effectLst>
@@ -7905,7 +7586,7 @@
             <a:r>
               <a:rPr lang="en-US" sz="1400" dirty="0">
                 <a:solidFill>
-                  <a:srgbClr val="E6EDF3"/>
+                  <a:srgbClr val="1F2937"/>
                 </a:solidFill>
                 <a:latin typeface="Calibri" pitchFamily="34" charset="0"/>
                 <a:ea typeface="Calibri" pitchFamily="34" charset="-122"/>
@@ -7926,7 +7607,7 @@
             <a:r>
               <a:rPr lang="en-US" sz="1400" dirty="0">
                 <a:solidFill>
-                  <a:srgbClr val="E6EDF3"/>
+                  <a:srgbClr val="1F2937"/>
                 </a:solidFill>
                 <a:latin typeface="Calibri" pitchFamily="34" charset="0"/>
                 <a:ea typeface="Calibri" pitchFamily="34" charset="-122"/>
@@ -7947,7 +7628,7 @@
             <a:r>
               <a:rPr lang="en-US" sz="1400" dirty="0">
                 <a:solidFill>
-                  <a:srgbClr val="E6EDF3"/>
+                  <a:srgbClr val="1F2937"/>
                 </a:solidFill>
                 <a:latin typeface="Calibri" pitchFamily="34" charset="0"/>
                 <a:ea typeface="Calibri" pitchFamily="34" charset="-122"/>
@@ -7968,7 +7649,7 @@
             <a:r>
               <a:rPr lang="en-US" sz="1400" dirty="0">
                 <a:solidFill>
-                  <a:srgbClr val="E6EDF3"/>
+                  <a:srgbClr val="1F2937"/>
                 </a:solidFill>
                 <a:latin typeface="Calibri" pitchFamily="34" charset="0"/>
                 <a:ea typeface="Calibri" pitchFamily="34" charset="-122"/>
@@ -7989,7 +7670,7 @@
             <a:r>
               <a:rPr lang="en-US" sz="1400" dirty="0">
                 <a:solidFill>
-                  <a:srgbClr val="E6EDF3"/>
+                  <a:srgbClr val="1F2937"/>
                 </a:solidFill>
                 <a:latin typeface="Calibri" pitchFamily="34" charset="0"/>
                 <a:ea typeface="Calibri" pitchFamily="34" charset="-122"/>
@@ -8028,7 +7709,7 @@
             <a:r>
               <a:rPr lang="en-US" sz="900" dirty="0">
                 <a:solidFill>
-                  <a:srgbClr val="94A3B8"/>
+                  <a:srgbClr val="64748B"/>
                 </a:solidFill>
                 <a:latin typeface="Calibri" pitchFamily="34" charset="0"/>
                 <a:ea typeface="Calibri" pitchFamily="34" charset="-122"/>
@@ -8040,38 +7721,9 @@
           </a:p>
         </p:txBody>
       </p:sp>
-      <p:sp>
-        <p:nvSpPr>
-          <p:cNvPr id="8" name="Shape 5"/>
-          <p:cNvSpPr/>
-          <p:nvPr/>
-        </p:nvSpPr>
-        <p:spPr>
-          <a:xfrm>
-            <a:off x="7772400" y="4590288"/>
-            <a:ext cx="969264" cy="475488"/>
-          </a:xfrm>
-          <a:prstGeom prst="roundRect">
-            <a:avLst>
-              <a:gd name="adj" fmla="val 11538"/>
-            </a:avLst>
-          </a:prstGeom>
-          <a:solidFill>
-            <a:srgbClr val="FFFFFF"/>
-          </a:solidFill>
-          <a:ln/>
-          <a:effectLst>
-            <a:outerShdw sx="100000" sy="100000" kx="0" ky="0" algn="bl" rotWithShape="0" blurRad="101600" dist="38100" dir="5400000">
-              <a:srgbClr val="000000">
-                <a:alpha val="35000"/>
-              </a:srgbClr>
-            </a:outerShdw>
-          </a:effectLst>
-        </p:spPr>
-      </p:sp>
       <p:pic>
         <p:nvPicPr>
-          <p:cNvPr id="9" name="Image 1" descr="/Users/pop7/Library/CloudStorage/OneDrive-MonsterConnectCo.,Ltd/Lecture/KOSEN69 - software-security/slides/pptx/assets/logo-small.png">    </p:cNvPr>
+          <p:cNvPr id="8" name="Image 1" descr="/Users/pop7/Library/CloudStorage/OneDrive-MonsterConnectCo.,Ltd/Lecture/KOSEN69 - software-security/slides/pptx/assets/logo-small.png">    </p:cNvPr>
           <p:cNvPicPr>
             <a:picLocks noChangeAspect="1"/>
           </p:cNvPicPr>
@@ -8085,7 +7737,7 @@
         </p:blipFill>
         <p:spPr>
           <a:xfrm>
-            <a:off x="7872984" y="4681728"/>
+            <a:off x="7882128" y="4700016"/>
             <a:ext cx="768096" cy="356616"/>
           </a:xfrm>
           <a:prstGeom prst="rect">
@@ -8107,7 +7759,7 @@
     <p:bg>
       <p:bgPr>
         <a:solidFill>
-          <a:srgbClr val="0E1726"/>
+          <a:srgbClr val="FFFFFF"/>
         </a:solidFill>
       </p:bgPr>
     </p:bg>
@@ -8144,9 +7796,9 @@
           </a:solidFill>
           <a:ln/>
           <a:effectLst>
-            <a:outerShdw sx="100000" sy="100000" kx="0" ky="0" algn="bl" rotWithShape="0" blurRad="101600" dist="38100" dir="5400000">
+            <a:outerShdw sx="100000" sy="100000" kx="0" ky="0" algn="bl" rotWithShape="0" blurRad="76200" dist="25400" dir="5400000">
               <a:srgbClr val="000000">
-                <a:alpha val="35000"/>
+                <a:alpha val="12000"/>
               </a:srgbClr>
             </a:outerShdw>
           </a:effectLst>
@@ -8203,7 +7855,7 @@
             <a:r>
               <a:rPr lang="en-US" sz="2600" b="1" dirty="0">
                 <a:solidFill>
-                  <a:srgbClr val="E6EDF3"/>
+                  <a:srgbClr val="1F2937"/>
                 </a:solidFill>
                 <a:latin typeface="Arial" pitchFamily="34" charset="0"/>
                 <a:ea typeface="Arial" pitchFamily="34" charset="-122"/>
@@ -8232,13 +7884,13 @@
             </a:avLst>
           </a:prstGeom>
           <a:solidFill>
-            <a:srgbClr val="18243A"/>
+            <a:srgbClr val="F1F5F9"/>
           </a:solidFill>
           <a:ln/>
           <a:effectLst>
-            <a:outerShdw sx="100000" sy="100000" kx="0" ky="0" algn="bl" rotWithShape="0" blurRad="101600" dist="38100" dir="5400000">
+            <a:outerShdw sx="100000" sy="100000" kx="0" ky="0" algn="bl" rotWithShape="0" blurRad="76200" dist="25400" dir="5400000">
               <a:srgbClr val="000000">
-                <a:alpha val="35000"/>
+                <a:alpha val="12000"/>
               </a:srgbClr>
             </a:outerShdw>
           </a:effectLst>
@@ -8275,7 +7927,7 @@
             <a:r>
               <a:rPr lang="en-US" sz="1400" dirty="0">
                 <a:solidFill>
-                  <a:srgbClr val="E6EDF3"/>
+                  <a:srgbClr val="1F2937"/>
                 </a:solidFill>
                 <a:latin typeface="Calibri" pitchFamily="34" charset="0"/>
                 <a:ea typeface="Calibri" pitchFamily="34" charset="-122"/>
@@ -8296,7 +7948,7 @@
             <a:r>
               <a:rPr lang="en-US" sz="1400" dirty="0">
                 <a:solidFill>
-                  <a:srgbClr val="E6EDF3"/>
+                  <a:srgbClr val="1F2937"/>
                 </a:solidFill>
                 <a:latin typeface="Calibri" pitchFamily="34" charset="0"/>
                 <a:ea typeface="Calibri" pitchFamily="34" charset="-122"/>
@@ -8335,7 +7987,7 @@
             <a:r>
               <a:rPr lang="en-US" sz="900" dirty="0">
                 <a:solidFill>
-                  <a:srgbClr val="94A3B8"/>
+                  <a:srgbClr val="64748B"/>
                 </a:solidFill>
                 <a:latin typeface="Calibri" pitchFamily="34" charset="0"/>
                 <a:ea typeface="Calibri" pitchFamily="34" charset="-122"/>
@@ -8347,38 +7999,9 @@
           </a:p>
         </p:txBody>
       </p:sp>
-      <p:sp>
-        <p:nvSpPr>
-          <p:cNvPr id="8" name="Shape 5"/>
-          <p:cNvSpPr/>
-          <p:nvPr/>
-        </p:nvSpPr>
-        <p:spPr>
-          <a:xfrm>
-            <a:off x="7772400" y="4590288"/>
-            <a:ext cx="969264" cy="475488"/>
-          </a:xfrm>
-          <a:prstGeom prst="roundRect">
-            <a:avLst>
-              <a:gd name="adj" fmla="val 11538"/>
-            </a:avLst>
-          </a:prstGeom>
-          <a:solidFill>
-            <a:srgbClr val="FFFFFF"/>
-          </a:solidFill>
-          <a:ln/>
-          <a:effectLst>
-            <a:outerShdw sx="100000" sy="100000" kx="0" ky="0" algn="bl" rotWithShape="0" blurRad="101600" dist="38100" dir="5400000">
-              <a:srgbClr val="000000">
-                <a:alpha val="35000"/>
-              </a:srgbClr>
-            </a:outerShdw>
-          </a:effectLst>
-        </p:spPr>
-      </p:sp>
       <p:pic>
         <p:nvPicPr>
-          <p:cNvPr id="9" name="Image 1" descr="/Users/pop7/Library/CloudStorage/OneDrive-MonsterConnectCo.,Ltd/Lecture/KOSEN69 - software-security/slides/pptx/assets/logo-small.png">    </p:cNvPr>
+          <p:cNvPr id="8" name="Image 1" descr="/Users/pop7/Library/CloudStorage/OneDrive-MonsterConnectCo.,Ltd/Lecture/KOSEN69 - software-security/slides/pptx/assets/logo-small.png">    </p:cNvPr>
           <p:cNvPicPr>
             <a:picLocks noChangeAspect="1"/>
           </p:cNvPicPr>
@@ -8392,7 +8015,7 @@
         </p:blipFill>
         <p:spPr>
           <a:xfrm>
-            <a:off x="7872984" y="4681728"/>
+            <a:off x="7882128" y="4700016"/>
             <a:ext cx="768096" cy="356616"/>
           </a:xfrm>
           <a:prstGeom prst="rect">
@@ -8414,7 +8037,7 @@
     <p:bg>
       <p:bgPr>
         <a:solidFill>
-          <a:srgbClr val="0E1726"/>
+          <a:srgbClr val="FFFFFF"/>
         </a:solidFill>
       </p:bgPr>
     </p:bg>
@@ -8451,9 +8074,9 @@
           </a:solidFill>
           <a:ln/>
           <a:effectLst>
-            <a:outerShdw sx="100000" sy="100000" kx="0" ky="0" algn="bl" rotWithShape="0" blurRad="101600" dist="38100" dir="5400000">
+            <a:outerShdw sx="100000" sy="100000" kx="0" ky="0" algn="bl" rotWithShape="0" blurRad="76200" dist="25400" dir="5400000">
               <a:srgbClr val="000000">
-                <a:alpha val="35000"/>
+                <a:alpha val="12000"/>
               </a:srgbClr>
             </a:outerShdw>
           </a:effectLst>
@@ -8510,7 +8133,7 @@
             <a:r>
               <a:rPr lang="en-US" sz="2600" b="1" dirty="0">
                 <a:solidFill>
-                  <a:srgbClr val="E6EDF3"/>
+                  <a:srgbClr val="1F2937"/>
                 </a:solidFill>
                 <a:latin typeface="Arial" pitchFamily="34" charset="0"/>
                 <a:ea typeface="Arial" pitchFamily="34" charset="-122"/>
@@ -8539,13 +8162,13 @@
             </a:avLst>
           </a:prstGeom>
           <a:solidFill>
-            <a:srgbClr val="18243A"/>
+            <a:srgbClr val="F1F5F9"/>
           </a:solidFill>
           <a:ln/>
           <a:effectLst>
-            <a:outerShdw sx="100000" sy="100000" kx="0" ky="0" algn="bl" rotWithShape="0" blurRad="101600" dist="38100" dir="5400000">
+            <a:outerShdw sx="100000" sy="100000" kx="0" ky="0" algn="bl" rotWithShape="0" blurRad="76200" dist="25400" dir="5400000">
               <a:srgbClr val="000000">
-                <a:alpha val="35000"/>
+                <a:alpha val="12000"/>
               </a:srgbClr>
             </a:outerShdw>
           </a:effectLst>
@@ -8582,13 +8205,13 @@
             <a:r>
               <a:rPr lang="en-US" sz="1400" dirty="0">
                 <a:solidFill>
-                  <a:srgbClr val="E6EDF3"/>
+                  <a:srgbClr val="1F2937"/>
                 </a:solidFill>
                 <a:latin typeface="Calibri" pitchFamily="34" charset="0"/>
                 <a:ea typeface="Calibri" pitchFamily="34" charset="-122"/>
                 <a:cs typeface="Calibri" pitchFamily="34" charset="-120"/>
               </a:rPr>
-              <a:t>Authentication — *who are you?* (login, MFA)</a:t>
+              <a:t>Authentication — who are you? (login, MFA)</a:t>
             </a:r>
             <a:endParaRPr lang="en-US" sz="1400" dirty="0"/>
           </a:p>
@@ -8603,13 +8226,13 @@
             <a:r>
               <a:rPr lang="en-US" sz="1400" dirty="0">
                 <a:solidFill>
-                  <a:srgbClr val="E6EDF3"/>
+                  <a:srgbClr val="1F2937"/>
                 </a:solidFill>
                 <a:latin typeface="Calibri" pitchFamily="34" charset="0"/>
                 <a:ea typeface="Calibri" pitchFamily="34" charset="-122"/>
                 <a:cs typeface="Calibri" pitchFamily="34" charset="-120"/>
               </a:rPr>
-              <a:t>Authorization — *what are you allowed to do?*</a:t>
+              <a:t>Authorization — what are you allowed to do?</a:t>
             </a:r>
             <a:endParaRPr lang="en-US" sz="1400" dirty="0"/>
           </a:p>
@@ -8624,7 +8247,7 @@
             <a:r>
               <a:rPr lang="en-US" sz="1400" dirty="0">
                 <a:solidFill>
-                  <a:srgbClr val="E6EDF3"/>
+                  <a:srgbClr val="1F2937"/>
                 </a:solidFill>
                 <a:latin typeface="Calibri" pitchFamily="34" charset="0"/>
                 <a:ea typeface="Calibri" pitchFamily="34" charset="-122"/>
@@ -8645,7 +8268,7 @@
             <a:r>
               <a:rPr lang="en-US" sz="1400" dirty="0">
                 <a:solidFill>
-                  <a:srgbClr val="E6EDF3"/>
+                  <a:srgbClr val="1F2937"/>
                 </a:solidFill>
                 <a:latin typeface="Calibri" pitchFamily="34" charset="0"/>
                 <a:ea typeface="Calibri" pitchFamily="34" charset="-122"/>
@@ -8684,7 +8307,7 @@
             <a:r>
               <a:rPr lang="en-US" sz="900" dirty="0">
                 <a:solidFill>
-                  <a:srgbClr val="94A3B8"/>
+                  <a:srgbClr val="64748B"/>
                 </a:solidFill>
                 <a:latin typeface="Calibri" pitchFamily="34" charset="0"/>
                 <a:ea typeface="Calibri" pitchFamily="34" charset="-122"/>
@@ -8696,38 +8319,9 @@
           </a:p>
         </p:txBody>
       </p:sp>
-      <p:sp>
-        <p:nvSpPr>
-          <p:cNvPr id="8" name="Shape 5"/>
-          <p:cNvSpPr/>
-          <p:nvPr/>
-        </p:nvSpPr>
-        <p:spPr>
-          <a:xfrm>
-            <a:off x="7772400" y="4590288"/>
-            <a:ext cx="969264" cy="475488"/>
-          </a:xfrm>
-          <a:prstGeom prst="roundRect">
-            <a:avLst>
-              <a:gd name="adj" fmla="val 11538"/>
-            </a:avLst>
-          </a:prstGeom>
-          <a:solidFill>
-            <a:srgbClr val="FFFFFF"/>
-          </a:solidFill>
-          <a:ln/>
-          <a:effectLst>
-            <a:outerShdw sx="100000" sy="100000" kx="0" ky="0" algn="bl" rotWithShape="0" blurRad="101600" dist="38100" dir="5400000">
-              <a:srgbClr val="000000">
-                <a:alpha val="35000"/>
-              </a:srgbClr>
-            </a:outerShdw>
-          </a:effectLst>
-        </p:spPr>
-      </p:sp>
       <p:pic>
         <p:nvPicPr>
-          <p:cNvPr id="9" name="Image 1" descr="/Users/pop7/Library/CloudStorage/OneDrive-MonsterConnectCo.,Ltd/Lecture/KOSEN69 - software-security/slides/pptx/assets/logo-small.png">    </p:cNvPr>
+          <p:cNvPr id="8" name="Image 1" descr="/Users/pop7/Library/CloudStorage/OneDrive-MonsterConnectCo.,Ltd/Lecture/KOSEN69 - software-security/slides/pptx/assets/logo-small.png">    </p:cNvPr>
           <p:cNvPicPr>
             <a:picLocks noChangeAspect="1"/>
           </p:cNvPicPr>
@@ -8741,7 +8335,7 @@
         </p:blipFill>
         <p:spPr>
           <a:xfrm>
-            <a:off x="7872984" y="4681728"/>
+            <a:off x="7882128" y="4700016"/>
             <a:ext cx="768096" cy="356616"/>
           </a:xfrm>
           <a:prstGeom prst="rect">
@@ -8763,7 +8357,7 @@
     <p:bg>
       <p:bgPr>
         <a:solidFill>
-          <a:srgbClr val="0E1726"/>
+          <a:srgbClr val="FFFFFF"/>
         </a:solidFill>
       </p:bgPr>
     </p:bg>
@@ -8800,9 +8394,9 @@
           </a:solidFill>
           <a:ln/>
           <a:effectLst>
-            <a:outerShdw sx="100000" sy="100000" kx="0" ky="0" algn="bl" rotWithShape="0" blurRad="101600" dist="38100" dir="5400000">
+            <a:outerShdw sx="100000" sy="100000" kx="0" ky="0" algn="bl" rotWithShape="0" blurRad="76200" dist="25400" dir="5400000">
               <a:srgbClr val="000000">
-                <a:alpha val="35000"/>
+                <a:alpha val="12000"/>
               </a:srgbClr>
             </a:outerShdw>
           </a:effectLst>
@@ -8859,7 +8453,7 @@
             <a:r>
               <a:rPr lang="en-US" sz="2600" b="1" dirty="0">
                 <a:solidFill>
-                  <a:srgbClr val="E6EDF3"/>
+                  <a:srgbClr val="1F2937"/>
                 </a:solidFill>
                 <a:latin typeface="Arial" pitchFamily="34" charset="0"/>
                 <a:ea typeface="Arial" pitchFamily="34" charset="-122"/>
@@ -8888,13 +8482,13 @@
             </a:avLst>
           </a:prstGeom>
           <a:solidFill>
-            <a:srgbClr val="18243A"/>
+            <a:srgbClr val="F1F5F9"/>
           </a:solidFill>
           <a:ln/>
           <a:effectLst>
-            <a:outerShdw sx="100000" sy="100000" kx="0" ky="0" algn="bl" rotWithShape="0" blurRad="101600" dist="38100" dir="5400000">
+            <a:outerShdw sx="100000" sy="100000" kx="0" ky="0" algn="bl" rotWithShape="0" blurRad="76200" dist="25400" dir="5400000">
               <a:srgbClr val="000000">
-                <a:alpha val="35000"/>
+                <a:alpha val="12000"/>
               </a:srgbClr>
             </a:outerShdw>
           </a:effectLst>
@@ -8931,7 +8525,7 @@
             <a:r>
               <a:rPr lang="en-US" sz="1400" dirty="0">
                 <a:solidFill>
-                  <a:srgbClr val="E6EDF3"/>
+                  <a:srgbClr val="1F2937"/>
                 </a:solidFill>
                 <a:latin typeface="Calibri" pitchFamily="34" charset="0"/>
                 <a:ea typeface="Calibri" pitchFamily="34" charset="-122"/>
@@ -8952,7 +8546,7 @@
             <a:r>
               <a:rPr lang="en-US" sz="1400" dirty="0">
                 <a:solidFill>
-                  <a:srgbClr val="E6EDF3"/>
+                  <a:srgbClr val="1F2937"/>
                 </a:solidFill>
                 <a:latin typeface="Calibri" pitchFamily="34" charset="0"/>
                 <a:ea typeface="Calibri" pitchFamily="34" charset="-122"/>
@@ -8973,7 +8567,7 @@
             <a:r>
               <a:rPr lang="en-US" sz="1400" dirty="0">
                 <a:solidFill>
-                  <a:srgbClr val="E6EDF3"/>
+                  <a:srgbClr val="1F2937"/>
                 </a:solidFill>
                 <a:latin typeface="Calibri" pitchFamily="34" charset="0"/>
                 <a:ea typeface="Calibri" pitchFamily="34" charset="-122"/>
@@ -9012,7 +8606,7 @@
             <a:r>
               <a:rPr lang="en-US" sz="900" dirty="0">
                 <a:solidFill>
-                  <a:srgbClr val="94A3B8"/>
+                  <a:srgbClr val="64748B"/>
                 </a:solidFill>
                 <a:latin typeface="Calibri" pitchFamily="34" charset="0"/>
                 <a:ea typeface="Calibri" pitchFamily="34" charset="-122"/>
@@ -9024,38 +8618,9 @@
           </a:p>
         </p:txBody>
       </p:sp>
-      <p:sp>
-        <p:nvSpPr>
-          <p:cNvPr id="8" name="Shape 5"/>
-          <p:cNvSpPr/>
-          <p:nvPr/>
-        </p:nvSpPr>
-        <p:spPr>
-          <a:xfrm>
-            <a:off x="7772400" y="4590288"/>
-            <a:ext cx="969264" cy="475488"/>
-          </a:xfrm>
-          <a:prstGeom prst="roundRect">
-            <a:avLst>
-              <a:gd name="adj" fmla="val 11538"/>
-            </a:avLst>
-          </a:prstGeom>
-          <a:solidFill>
-            <a:srgbClr val="FFFFFF"/>
-          </a:solidFill>
-          <a:ln/>
-          <a:effectLst>
-            <a:outerShdw sx="100000" sy="100000" kx="0" ky="0" algn="bl" rotWithShape="0" blurRad="101600" dist="38100" dir="5400000">
-              <a:srgbClr val="000000">
-                <a:alpha val="35000"/>
-              </a:srgbClr>
-            </a:outerShdw>
-          </a:effectLst>
-        </p:spPr>
-      </p:sp>
       <p:pic>
         <p:nvPicPr>
-          <p:cNvPr id="9" name="Image 1" descr="/Users/pop7/Library/CloudStorage/OneDrive-MonsterConnectCo.,Ltd/Lecture/KOSEN69 - software-security/slides/pptx/assets/logo-small.png">    </p:cNvPr>
+          <p:cNvPr id="8" name="Image 1" descr="/Users/pop7/Library/CloudStorage/OneDrive-MonsterConnectCo.,Ltd/Lecture/KOSEN69 - software-security/slides/pptx/assets/logo-small.png">    </p:cNvPr>
           <p:cNvPicPr>
             <a:picLocks noChangeAspect="1"/>
           </p:cNvPicPr>
@@ -9069,7 +8634,7 @@
         </p:blipFill>
         <p:spPr>
           <a:xfrm>
-            <a:off x="7872984" y="4681728"/>
+            <a:off x="7882128" y="4700016"/>
             <a:ext cx="768096" cy="356616"/>
           </a:xfrm>
           <a:prstGeom prst="rect">
@@ -9091,7 +8656,7 @@
     <p:bg>
       <p:bgPr>
         <a:solidFill>
-          <a:srgbClr val="0E1726"/>
+          <a:srgbClr val="FFFFFF"/>
         </a:solidFill>
       </p:bgPr>
     </p:bg>
@@ -9128,9 +8693,9 @@
           </a:solidFill>
           <a:ln/>
           <a:effectLst>
-            <a:outerShdw sx="100000" sy="100000" kx="0" ky="0" algn="bl" rotWithShape="0" blurRad="101600" dist="38100" dir="5400000">
+            <a:outerShdw sx="100000" sy="100000" kx="0" ky="0" algn="bl" rotWithShape="0" blurRad="76200" dist="25400" dir="5400000">
               <a:srgbClr val="000000">
-                <a:alpha val="35000"/>
+                <a:alpha val="12000"/>
               </a:srgbClr>
             </a:outerShdw>
           </a:effectLst>
@@ -9187,7 +8752,7 @@
             <a:r>
               <a:rPr lang="en-US" sz="2600" b="1" dirty="0">
                 <a:solidFill>
-                  <a:srgbClr val="E6EDF3"/>
+                  <a:srgbClr val="1F2937"/>
                 </a:solidFill>
                 <a:latin typeface="Arial" pitchFamily="34" charset="0"/>
                 <a:ea typeface="Arial" pitchFamily="34" charset="-122"/>
@@ -9220,7 +8785,7 @@
           </a:solidFill>
           <a:ln w="12700">
             <a:solidFill>
-              <a:srgbClr val="1E2B45"/>
+              <a:srgbClr val="E8EDF3"/>
             </a:solidFill>
             <a:prstDash val="solid"/>
           </a:ln>
@@ -9282,13 +8847,13 @@
             </a:avLst>
           </a:prstGeom>
           <a:solidFill>
-            <a:srgbClr val="18243A"/>
+            <a:srgbClr val="F1F5F9"/>
           </a:solidFill>
           <a:ln/>
           <a:effectLst>
-            <a:outerShdw sx="100000" sy="100000" kx="0" ky="0" algn="bl" rotWithShape="0" blurRad="101600" dist="38100" dir="5400000">
+            <a:outerShdw sx="100000" sy="100000" kx="0" ky="0" algn="bl" rotWithShape="0" blurRad="76200" dist="25400" dir="5400000">
               <a:srgbClr val="000000">
-                <a:alpha val="35000"/>
+                <a:alpha val="12000"/>
               </a:srgbClr>
             </a:outerShdw>
           </a:effectLst>
@@ -9325,7 +8890,7 @@
             <a:r>
               <a:rPr lang="en-US" sz="1400" dirty="0">
                 <a:solidFill>
-                  <a:srgbClr val="E6EDF3"/>
+                  <a:srgbClr val="1F2937"/>
                 </a:solidFill>
                 <a:latin typeface="Calibri" pitchFamily="34" charset="0"/>
                 <a:ea typeface="Calibri" pitchFamily="34" charset="-122"/>
@@ -9346,7 +8911,7 @@
             <a:r>
               <a:rPr lang="en-US" sz="1400" dirty="0">
                 <a:solidFill>
-                  <a:srgbClr val="E6EDF3"/>
+                  <a:srgbClr val="1F2937"/>
                 </a:solidFill>
                 <a:latin typeface="Calibri" pitchFamily="34" charset="0"/>
                 <a:ea typeface="Calibri" pitchFamily="34" charset="-122"/>
@@ -9367,7 +8932,7 @@
             <a:r>
               <a:rPr lang="en-US" sz="1400" dirty="0">
                 <a:solidFill>
-                  <a:srgbClr val="E6EDF3"/>
+                  <a:srgbClr val="1F2937"/>
                 </a:solidFill>
                 <a:latin typeface="Calibri" pitchFamily="34" charset="0"/>
                 <a:ea typeface="Calibri" pitchFamily="34" charset="-122"/>
@@ -9388,7 +8953,7 @@
             <a:r>
               <a:rPr lang="en-US" sz="1400" dirty="0">
                 <a:solidFill>
-                  <a:srgbClr val="E6EDF3"/>
+                  <a:srgbClr val="1F2937"/>
                 </a:solidFill>
                 <a:latin typeface="Calibri" pitchFamily="34" charset="0"/>
                 <a:ea typeface="Calibri" pitchFamily="34" charset="-122"/>
@@ -9427,7 +8992,7 @@
             <a:r>
               <a:rPr lang="en-US" sz="900" dirty="0">
                 <a:solidFill>
-                  <a:srgbClr val="94A3B8"/>
+                  <a:srgbClr val="64748B"/>
                 </a:solidFill>
                 <a:latin typeface="Calibri" pitchFamily="34" charset="0"/>
                 <a:ea typeface="Calibri" pitchFamily="34" charset="-122"/>
@@ -9439,38 +9004,9 @@
           </a:p>
         </p:txBody>
       </p:sp>
-      <p:sp>
-        <p:nvSpPr>
-          <p:cNvPr id="10" name="Shape 7"/>
-          <p:cNvSpPr/>
-          <p:nvPr/>
-        </p:nvSpPr>
-        <p:spPr>
-          <a:xfrm>
-            <a:off x="7772400" y="4590288"/>
-            <a:ext cx="969264" cy="475488"/>
-          </a:xfrm>
-          <a:prstGeom prst="roundRect">
-            <a:avLst>
-              <a:gd name="adj" fmla="val 11538"/>
-            </a:avLst>
-          </a:prstGeom>
-          <a:solidFill>
-            <a:srgbClr val="FFFFFF"/>
-          </a:solidFill>
-          <a:ln/>
-          <a:effectLst>
-            <a:outerShdw sx="100000" sy="100000" kx="0" ky="0" algn="bl" rotWithShape="0" blurRad="101600" dist="38100" dir="5400000">
-              <a:srgbClr val="000000">
-                <a:alpha val="35000"/>
-              </a:srgbClr>
-            </a:outerShdw>
-          </a:effectLst>
-        </p:spPr>
-      </p:sp>
       <p:pic>
         <p:nvPicPr>
-          <p:cNvPr id="11" name="Image 1" descr="/Users/pop7/Library/CloudStorage/OneDrive-MonsterConnectCo.,Ltd/Lecture/KOSEN69 - software-security/slides/pptx/assets/logo-small.png">    </p:cNvPr>
+          <p:cNvPr id="10" name="Image 1" descr="/Users/pop7/Library/CloudStorage/OneDrive-MonsterConnectCo.,Ltd/Lecture/KOSEN69 - software-security/slides/pptx/assets/logo-small.png">    </p:cNvPr>
           <p:cNvPicPr>
             <a:picLocks noChangeAspect="1"/>
           </p:cNvPicPr>
@@ -9484,7 +9020,7 @@
         </p:blipFill>
         <p:spPr>
           <a:xfrm>
-            <a:off x="7872984" y="4681728"/>
+            <a:off x="7882128" y="4700016"/>
             <a:ext cx="768096" cy="356616"/>
           </a:xfrm>
           <a:prstGeom prst="rect">
@@ -9506,7 +9042,7 @@
     <p:bg>
       <p:bgPr>
         <a:solidFill>
-          <a:srgbClr val="0E1726"/>
+          <a:srgbClr val="FFFFFF"/>
         </a:solidFill>
       </p:bgPr>
     </p:bg>
@@ -9543,9 +9079,9 @@
           </a:solidFill>
           <a:ln/>
           <a:effectLst>
-            <a:outerShdw sx="100000" sy="100000" kx="0" ky="0" algn="bl" rotWithShape="0" blurRad="101600" dist="38100" dir="5400000">
+            <a:outerShdw sx="100000" sy="100000" kx="0" ky="0" algn="bl" rotWithShape="0" blurRad="76200" dist="25400" dir="5400000">
               <a:srgbClr val="000000">
-                <a:alpha val="35000"/>
+                <a:alpha val="12000"/>
               </a:srgbClr>
             </a:outerShdw>
           </a:effectLst>
@@ -9602,7 +9138,7 @@
             <a:r>
               <a:rPr lang="en-US" sz="2600" b="1" dirty="0">
                 <a:solidFill>
-                  <a:srgbClr val="E6EDF3"/>
+                  <a:srgbClr val="1F2937"/>
                 </a:solidFill>
                 <a:latin typeface="Arial" pitchFamily="34" charset="0"/>
                 <a:ea typeface="Arial" pitchFamily="34" charset="-122"/>
@@ -9631,13 +9167,13 @@
             </a:avLst>
           </a:prstGeom>
           <a:solidFill>
-            <a:srgbClr val="18243A"/>
+            <a:srgbClr val="F1F5F9"/>
           </a:solidFill>
           <a:ln/>
           <a:effectLst>
-            <a:outerShdw sx="100000" sy="100000" kx="0" ky="0" algn="bl" rotWithShape="0" blurRad="101600" dist="38100" dir="5400000">
+            <a:outerShdw sx="100000" sy="100000" kx="0" ky="0" algn="bl" rotWithShape="0" blurRad="76200" dist="25400" dir="5400000">
               <a:srgbClr val="000000">
-                <a:alpha val="35000"/>
+                <a:alpha val="12000"/>
               </a:srgbClr>
             </a:outerShdw>
           </a:effectLst>
@@ -9674,7 +9210,7 @@
             <a:r>
               <a:rPr lang="en-US" sz="1400" dirty="0">
                 <a:solidFill>
-                  <a:srgbClr val="E6EDF3"/>
+                  <a:srgbClr val="1F2937"/>
                 </a:solidFill>
                 <a:latin typeface="Calibri" pitchFamily="34" charset="0"/>
                 <a:ea typeface="Calibri" pitchFamily="34" charset="-122"/>
@@ -9695,7 +9231,7 @@
             <a:r>
               <a:rPr lang="en-US" sz="1400" dirty="0">
                 <a:solidFill>
-                  <a:srgbClr val="E6EDF3"/>
+                  <a:srgbClr val="1F2937"/>
                 </a:solidFill>
                 <a:latin typeface="Calibri" pitchFamily="34" charset="0"/>
                 <a:ea typeface="Calibri" pitchFamily="34" charset="-122"/>
@@ -9716,7 +9252,7 @@
             <a:r>
               <a:rPr lang="en-US" sz="1400" dirty="0">
                 <a:solidFill>
-                  <a:srgbClr val="E6EDF3"/>
+                  <a:srgbClr val="1F2937"/>
                 </a:solidFill>
                 <a:latin typeface="Calibri" pitchFamily="34" charset="0"/>
                 <a:ea typeface="Calibri" pitchFamily="34" charset="-122"/>
@@ -9755,7 +9291,7 @@
             <a:r>
               <a:rPr lang="en-US" sz="900" dirty="0">
                 <a:solidFill>
-                  <a:srgbClr val="94A3B8"/>
+                  <a:srgbClr val="64748B"/>
                 </a:solidFill>
                 <a:latin typeface="Calibri" pitchFamily="34" charset="0"/>
                 <a:ea typeface="Calibri" pitchFamily="34" charset="-122"/>
@@ -9767,38 +9303,9 @@
           </a:p>
         </p:txBody>
       </p:sp>
-      <p:sp>
-        <p:nvSpPr>
-          <p:cNvPr id="8" name="Shape 5"/>
-          <p:cNvSpPr/>
-          <p:nvPr/>
-        </p:nvSpPr>
-        <p:spPr>
-          <a:xfrm>
-            <a:off x="7772400" y="4590288"/>
-            <a:ext cx="969264" cy="475488"/>
-          </a:xfrm>
-          <a:prstGeom prst="roundRect">
-            <a:avLst>
-              <a:gd name="adj" fmla="val 11538"/>
-            </a:avLst>
-          </a:prstGeom>
-          <a:solidFill>
-            <a:srgbClr val="FFFFFF"/>
-          </a:solidFill>
-          <a:ln/>
-          <a:effectLst>
-            <a:outerShdw sx="100000" sy="100000" kx="0" ky="0" algn="bl" rotWithShape="0" blurRad="101600" dist="38100" dir="5400000">
-              <a:srgbClr val="000000">
-                <a:alpha val="35000"/>
-              </a:srgbClr>
-            </a:outerShdw>
-          </a:effectLst>
-        </p:spPr>
-      </p:sp>
       <p:pic>
         <p:nvPicPr>
-          <p:cNvPr id="9" name="Image 1" descr="/Users/pop7/Library/CloudStorage/OneDrive-MonsterConnectCo.,Ltd/Lecture/KOSEN69 - software-security/slides/pptx/assets/logo-small.png">    </p:cNvPr>
+          <p:cNvPr id="8" name="Image 1" descr="/Users/pop7/Library/CloudStorage/OneDrive-MonsterConnectCo.,Ltd/Lecture/KOSEN69 - software-security/slides/pptx/assets/logo-small.png">    </p:cNvPr>
           <p:cNvPicPr>
             <a:picLocks noChangeAspect="1"/>
           </p:cNvPicPr>
@@ -9812,7 +9319,7 @@
         </p:blipFill>
         <p:spPr>
           <a:xfrm>
-            <a:off x="7872984" y="4681728"/>
+            <a:off x="7882128" y="4700016"/>
             <a:ext cx="768096" cy="356616"/>
           </a:xfrm>
           <a:prstGeom prst="rect">
@@ -9834,7 +9341,7 @@
     <p:bg>
       <p:bgPr>
         <a:solidFill>
-          <a:srgbClr val="0E1726"/>
+          <a:srgbClr val="FFFFFF"/>
         </a:solidFill>
       </p:bgPr>
     </p:bg>
@@ -9871,9 +9378,9 @@
           </a:solidFill>
           <a:ln/>
           <a:effectLst>
-            <a:outerShdw sx="100000" sy="100000" kx="0" ky="0" algn="bl" rotWithShape="0" blurRad="101600" dist="38100" dir="5400000">
+            <a:outerShdw sx="100000" sy="100000" kx="0" ky="0" algn="bl" rotWithShape="0" blurRad="76200" dist="25400" dir="5400000">
               <a:srgbClr val="000000">
-                <a:alpha val="35000"/>
+                <a:alpha val="12000"/>
               </a:srgbClr>
             </a:outerShdw>
           </a:effectLst>
@@ -9930,7 +9437,7 @@
             <a:r>
               <a:rPr lang="en-US" sz="2600" b="1" dirty="0">
                 <a:solidFill>
-                  <a:srgbClr val="E6EDF3"/>
+                  <a:srgbClr val="1F2937"/>
                 </a:solidFill>
                 <a:latin typeface="Arial" pitchFamily="34" charset="0"/>
                 <a:ea typeface="Arial" pitchFamily="34" charset="-122"/>
@@ -9963,7 +9470,7 @@
           </a:solidFill>
           <a:ln w="12700">
             <a:solidFill>
-              <a:srgbClr val="1E2B45"/>
+              <a:srgbClr val="E8EDF3"/>
             </a:solidFill>
             <a:prstDash val="solid"/>
           </a:ln>
@@ -10042,13 +9549,13 @@
             </a:avLst>
           </a:prstGeom>
           <a:solidFill>
-            <a:srgbClr val="18243A"/>
+            <a:srgbClr val="F1F5F9"/>
           </a:solidFill>
           <a:ln/>
           <a:effectLst>
-            <a:outerShdw sx="100000" sy="100000" kx="0" ky="0" algn="bl" rotWithShape="0" blurRad="101600" dist="38100" dir="5400000">
+            <a:outerShdw sx="100000" sy="100000" kx="0" ky="0" algn="bl" rotWithShape="0" blurRad="76200" dist="25400" dir="5400000">
               <a:srgbClr val="000000">
-                <a:alpha val="35000"/>
+                <a:alpha val="12000"/>
               </a:srgbClr>
             </a:outerShdw>
           </a:effectLst>
@@ -10085,7 +9592,7 @@
             <a:r>
               <a:rPr lang="en-US" sz="1400" dirty="0">
                 <a:solidFill>
-                  <a:srgbClr val="E6EDF3"/>
+                  <a:srgbClr val="1F2937"/>
                 </a:solidFill>
                 <a:latin typeface="Calibri" pitchFamily="34" charset="0"/>
                 <a:ea typeface="Calibri" pitchFamily="34" charset="-122"/>
@@ -10106,7 +9613,7 @@
             <a:r>
               <a:rPr lang="en-US" sz="1400" dirty="0">
                 <a:solidFill>
-                  <a:srgbClr val="E6EDF3"/>
+                  <a:srgbClr val="1F2937"/>
                 </a:solidFill>
                 <a:latin typeface="Calibri" pitchFamily="34" charset="0"/>
                 <a:ea typeface="Calibri" pitchFamily="34" charset="-122"/>
@@ -10145,7 +9652,7 @@
             <a:r>
               <a:rPr lang="en-US" sz="900" dirty="0">
                 <a:solidFill>
-                  <a:srgbClr val="94A3B8"/>
+                  <a:srgbClr val="64748B"/>
                 </a:solidFill>
                 <a:latin typeface="Calibri" pitchFamily="34" charset="0"/>
                 <a:ea typeface="Calibri" pitchFamily="34" charset="-122"/>
@@ -10157,38 +9664,9 @@
           </a:p>
         </p:txBody>
       </p:sp>
-      <p:sp>
-        <p:nvSpPr>
-          <p:cNvPr id="10" name="Shape 7"/>
-          <p:cNvSpPr/>
-          <p:nvPr/>
-        </p:nvSpPr>
-        <p:spPr>
-          <a:xfrm>
-            <a:off x="7772400" y="4590288"/>
-            <a:ext cx="969264" cy="475488"/>
-          </a:xfrm>
-          <a:prstGeom prst="roundRect">
-            <a:avLst>
-              <a:gd name="adj" fmla="val 11538"/>
-            </a:avLst>
-          </a:prstGeom>
-          <a:solidFill>
-            <a:srgbClr val="FFFFFF"/>
-          </a:solidFill>
-          <a:ln/>
-          <a:effectLst>
-            <a:outerShdw sx="100000" sy="100000" kx="0" ky="0" algn="bl" rotWithShape="0" blurRad="101600" dist="38100" dir="5400000">
-              <a:srgbClr val="000000">
-                <a:alpha val="35000"/>
-              </a:srgbClr>
-            </a:outerShdw>
-          </a:effectLst>
-        </p:spPr>
-      </p:sp>
       <p:pic>
         <p:nvPicPr>
-          <p:cNvPr id="11" name="Image 1" descr="/Users/pop7/Library/CloudStorage/OneDrive-MonsterConnectCo.,Ltd/Lecture/KOSEN69 - software-security/slides/pptx/assets/logo-small.png">    </p:cNvPr>
+          <p:cNvPr id="10" name="Image 1" descr="/Users/pop7/Library/CloudStorage/OneDrive-MonsterConnectCo.,Ltd/Lecture/KOSEN69 - software-security/slides/pptx/assets/logo-small.png">    </p:cNvPr>
           <p:cNvPicPr>
             <a:picLocks noChangeAspect="1"/>
           </p:cNvPicPr>
@@ -10202,7 +9680,7 @@
         </p:blipFill>
         <p:spPr>
           <a:xfrm>
-            <a:off x="7872984" y="4681728"/>
+            <a:off x="7882128" y="4700016"/>
             <a:ext cx="768096" cy="356616"/>
           </a:xfrm>
           <a:prstGeom prst="rect">
@@ -10224,7 +9702,7 @@
     <p:bg>
       <p:bgPr>
         <a:solidFill>
-          <a:srgbClr val="0E1726"/>
+          <a:srgbClr val="FFFFFF"/>
         </a:solidFill>
       </p:bgPr>
     </p:bg>
@@ -10261,9 +9739,9 @@
           </a:solidFill>
           <a:ln/>
           <a:effectLst>
-            <a:outerShdw sx="100000" sy="100000" kx="0" ky="0" algn="bl" rotWithShape="0" blurRad="101600" dist="38100" dir="5400000">
+            <a:outerShdw sx="100000" sy="100000" kx="0" ky="0" algn="bl" rotWithShape="0" blurRad="76200" dist="25400" dir="5400000">
               <a:srgbClr val="000000">
-                <a:alpha val="35000"/>
+                <a:alpha val="12000"/>
               </a:srgbClr>
             </a:outerShdw>
           </a:effectLst>
@@ -10320,7 +9798,7 @@
             <a:r>
               <a:rPr lang="en-US" sz="2600" b="1" dirty="0">
                 <a:solidFill>
-                  <a:srgbClr val="E6EDF3"/>
+                  <a:srgbClr val="1F2937"/>
                 </a:solidFill>
                 <a:latin typeface="Arial" pitchFamily="34" charset="0"/>
                 <a:ea typeface="Arial" pitchFamily="34" charset="-122"/>
@@ -10349,13 +9827,13 @@
             </a:avLst>
           </a:prstGeom>
           <a:solidFill>
-            <a:srgbClr val="18243A"/>
+            <a:srgbClr val="F1F5F9"/>
           </a:solidFill>
           <a:ln/>
           <a:effectLst>
-            <a:outerShdw sx="100000" sy="100000" kx="0" ky="0" algn="bl" rotWithShape="0" blurRad="101600" dist="38100" dir="5400000">
+            <a:outerShdw sx="100000" sy="100000" kx="0" ky="0" algn="bl" rotWithShape="0" blurRad="76200" dist="25400" dir="5400000">
               <a:srgbClr val="000000">
-                <a:alpha val="35000"/>
+                <a:alpha val="12000"/>
               </a:srgbClr>
             </a:outerShdw>
           </a:effectLst>
@@ -10392,7 +9870,7 @@
             <a:r>
               <a:rPr lang="en-US" sz="1400" dirty="0">
                 <a:solidFill>
-                  <a:srgbClr val="E6EDF3"/>
+                  <a:srgbClr val="1F2937"/>
                 </a:solidFill>
                 <a:latin typeface="Calibri" pitchFamily="34" charset="0"/>
                 <a:ea typeface="Calibri" pitchFamily="34" charset="-122"/>
@@ -10413,7 +9891,7 @@
             <a:r>
               <a:rPr lang="en-US" sz="1400" dirty="0">
                 <a:solidFill>
-                  <a:srgbClr val="E6EDF3"/>
+                  <a:srgbClr val="1F2937"/>
                 </a:solidFill>
                 <a:latin typeface="Calibri" pitchFamily="34" charset="0"/>
                 <a:ea typeface="Calibri" pitchFamily="34" charset="-122"/>
@@ -10434,7 +9912,7 @@
             <a:r>
               <a:rPr lang="en-US" sz="1400" dirty="0">
                 <a:solidFill>
-                  <a:srgbClr val="E6EDF3"/>
+                  <a:srgbClr val="1F2937"/>
                 </a:solidFill>
                 <a:latin typeface="Calibri" pitchFamily="34" charset="0"/>
                 <a:ea typeface="Calibri" pitchFamily="34" charset="-122"/>
@@ -10455,7 +9933,7 @@
             <a:r>
               <a:rPr lang="en-US" sz="1400" dirty="0">
                 <a:solidFill>
-                  <a:srgbClr val="E6EDF3"/>
+                  <a:srgbClr val="1F2937"/>
                 </a:solidFill>
                 <a:latin typeface="Calibri" pitchFamily="34" charset="0"/>
                 <a:ea typeface="Calibri" pitchFamily="34" charset="-122"/>
@@ -10484,7 +9962,7 @@
             </a:avLst>
           </a:prstGeom>
           <a:solidFill>
-            <a:srgbClr val="1E2B45"/>
+            <a:srgbClr val="E8EDF3"/>
           </a:solidFill>
           <a:ln/>
         </p:spPr>
@@ -10555,7 +10033,7 @@
             <a:r>
               <a:rPr lang="en-US" sz="900" dirty="0">
                 <a:solidFill>
-                  <a:srgbClr val="94A3B8"/>
+                  <a:srgbClr val="64748B"/>
                 </a:solidFill>
                 <a:latin typeface="Calibri" pitchFamily="34" charset="0"/>
                 <a:ea typeface="Calibri" pitchFamily="34" charset="-122"/>
@@ -10567,38 +10045,9 @@
           </a:p>
         </p:txBody>
       </p:sp>
-      <p:sp>
-        <p:nvSpPr>
-          <p:cNvPr id="10" name="Shape 7"/>
-          <p:cNvSpPr/>
-          <p:nvPr/>
-        </p:nvSpPr>
-        <p:spPr>
-          <a:xfrm>
-            <a:off x="7772400" y="4590288"/>
-            <a:ext cx="969264" cy="475488"/>
-          </a:xfrm>
-          <a:prstGeom prst="roundRect">
-            <a:avLst>
-              <a:gd name="adj" fmla="val 11538"/>
-            </a:avLst>
-          </a:prstGeom>
-          <a:solidFill>
-            <a:srgbClr val="FFFFFF"/>
-          </a:solidFill>
-          <a:ln/>
-          <a:effectLst>
-            <a:outerShdw sx="100000" sy="100000" kx="0" ky="0" algn="bl" rotWithShape="0" blurRad="101600" dist="38100" dir="5400000">
-              <a:srgbClr val="000000">
-                <a:alpha val="35000"/>
-              </a:srgbClr>
-            </a:outerShdw>
-          </a:effectLst>
-        </p:spPr>
-      </p:sp>
       <p:pic>
         <p:nvPicPr>
-          <p:cNvPr id="11" name="Image 1" descr="/Users/pop7/Library/CloudStorage/OneDrive-MonsterConnectCo.,Ltd/Lecture/KOSEN69 - software-security/slides/pptx/assets/logo-small.png">    </p:cNvPr>
+          <p:cNvPr id="10" name="Image 1" descr="/Users/pop7/Library/CloudStorage/OneDrive-MonsterConnectCo.,Ltd/Lecture/KOSEN69 - software-security/slides/pptx/assets/logo-small.png">    </p:cNvPr>
           <p:cNvPicPr>
             <a:picLocks noChangeAspect="1"/>
           </p:cNvPicPr>
@@ -10612,7 +10061,7 @@
         </p:blipFill>
         <p:spPr>
           <a:xfrm>
-            <a:off x="7872984" y="4681728"/>
+            <a:off x="7882128" y="4700016"/>
             <a:ext cx="768096" cy="356616"/>
           </a:xfrm>
           <a:prstGeom prst="rect">

--- a/slides/pptx/week06.pptx
+++ b/slides/pptx/week06.pptx
@@ -520,7 +520,7 @@
           <a:p>
             <a:r>
               <a:rPr lang="en-US" dirty="0"/>
-              <a:t/>
+              <a:t>Hook: change /orders/1001 to /1002 and read a stranger's data — promise that demo. The #1 web risk in 2025 is Broken Access Control, and it's mostly missing one check. ~2 min.</a:t>
             </a:r>
             <a:endParaRPr lang="en-US" dirty="0"/>
           </a:p>
@@ -608,7 +608,7 @@
           <a:p>
             <a:r>
               <a:rPr lang="en-US" dirty="0"/>
-              <a:t/>
+              <a:t>Run this interactively — give 2 minutes, then poll answers. (1) QA only. (2) add JIRA-write, narrowly (least privilege, not a full role bump). (3) Developer (write Git); discuss whether QA's staging deploy counts. ~6 min.</a:t>
             </a:r>
             <a:endParaRPr lang="en-US" dirty="0"/>
           </a:p>
@@ -696,7 +696,7 @@
           <a:p>
             <a:r>
               <a:rPr lang="en-US" dirty="0"/>
-              <a:t/>
+              <a:t>Ties W4 (SQLi auth bypass + upload→RCE) into incident response. Walk the three lines as a story: get in → plant webshell → run commands. Teach URL-decoding (%20=space). Defenders read logs; attackers leave them. ~5 min.</a:t>
             </a:r>
             <a:endParaRPr lang="en-US" dirty="0"/>
           </a:p>
@@ -784,7 +784,7 @@
           <a:p>
             <a:r>
               <a:rPr lang="en-US" dirty="0"/>
-              <a:t/>
+              <a:t>Reference for the worksheet. ~1 min.</a:t>
             </a:r>
             <a:endParaRPr lang="en-US" dirty="0"/>
           </a:p>
@@ -872,7 +872,7 @@
           <a:p>
             <a:r>
               <a:rPr lang="en-US" dirty="0"/>
-              <a:t/>
+              <a:t>The payoff. #1: authorize EVERY request, deny by default. "Check ownership, not just authentication" is the IDOR fix in one line. Centralize so you can't forget a check on one endpoint. ~6 min.</a:t>
             </a:r>
             <a:endParaRPr lang="en-US" dirty="0"/>
           </a:p>
@@ -960,7 +960,7 @@
           <a:p>
             <a:r>
               <a:rPr lang="en-US" dirty="0"/>
-              <a:t/>
+              <a:t>Practical — they'll use Repeater to tweak object ids and Intruder to enumerate. Demo: intercept, change orders/1001→1002, forward, see another user's data. Set scope first so you don't attack out-of-bounds. ~5 min.</a:t>
             </a:r>
             <a:endParaRPr lang="en-US" dirty="0"/>
           </a:p>
@@ -1048,7 +1048,7 @@
           <a:p>
             <a:r>
               <a:rPr lang="en-US" dirty="0"/>
-              <a:t/>
+              <a:t>Explain before lab. Treasure hunt = enumerate ids for per-student flags. JWT forgery = alg:none or crack a weak secret. Round 2 (fix it) is graded. ~3 min.</a:t>
             </a:r>
             <a:endParaRPr lang="en-US" dirty="0"/>
           </a:p>
@@ -1136,7 +1136,7 @@
           <a:p>
             <a:r>
               <a:rPr lang="en-US" dirty="0"/>
-              <a:t/>
+              <a:t>Logistics. Step 3-4 (defend + prove denial) graded. Q6 of the quiz asks for the object id they used + the fix + their personal flag. Also the NoteVault project access-control task.</a:t>
             </a:r>
             <a:endParaRPr lang="en-US" dirty="0"/>
           </a:p>
@@ -1224,7 +1224,7 @@
           <a:p>
             <a:r>
               <a:rPr lang="en-US" dirty="0"/>
-              <a:t/>
+              <a:t>Before/after + proof. AI-resilient tasks count.</a:t>
             </a:r>
             <a:endParaRPr lang="en-US" dirty="0"/>
           </a:p>
@@ -1312,7 +1312,7 @@
           <a:p>
             <a:r>
               <a:rPr lang="en-US" dirty="0"/>
-              <a:t/>
+              <a:t>Recap. Cold-call: "we authenticated the user — why can they still read another user's order?" (no ownership/authz check). ~2 min.</a:t>
             </a:r>
             <a:endParaRPr lang="en-US" dirty="0"/>
           </a:p>
@@ -1400,7 +1400,7 @@
           <a:p>
             <a:r>
               <a:rPr lang="en-US" dirty="0"/>
-              <a:t/>
+              <a:t>Wrap the teaching block: "Next week we consolidate W1-6 — Jeopardy + a mock CTF in the exact midterm format. Bring your cheat-sheet of CWEs." Remind cumulative review quiz in W7.</a:t>
             </a:r>
             <a:endParaRPr lang="en-US" dirty="0"/>
           </a:p>
@@ -1488,7 +1488,7 @@
           <a:p>
             <a:r>
               <a:rPr lang="en-US" dirty="0"/>
-              <a:t/>
+              <a:t>Roadmap, 1 min. This is the last teaching week before review/midterm — flag that. Lab = exploit IDOR + forge a JWT, then implement RBAC + proper verification.</a:t>
             </a:r>
             <a:endParaRPr lang="en-US" dirty="0"/>
           </a:p>
@@ -1576,7 +1576,7 @@
           <a:p>
             <a:r>
               <a:rPr lang="en-US" dirty="0"/>
-              <a:t/>
+              <a:t>1-min bridge. XSS could steal a session token; today: what IS that token, and how do we stop theft + misuse? Theme of the week: enforce on the server, every request.</a:t>
             </a:r>
             <a:endParaRPr lang="en-US" dirty="0"/>
           </a:p>
@@ -1664,7 +1664,7 @@
           <a:p>
             <a:r>
               <a:rPr lang="en-US" dirty="0"/>
-              <a:t/>
+              <a:t>The distinction students most often blur — make them repeat it. Authn = identity; authz = permission. A01 is #1 in OWASP 2025 precisely because authz checks get forgotten. Ask for an example of each failing. ~5 min.</a:t>
             </a:r>
             <a:endParaRPr lang="en-US" dirty="0"/>
           </a:p>
@@ -1752,7 +1752,7 @@
           <a:p>
             <a:r>
               <a:rPr lang="en-US" dirty="0"/>
-              <a:t/>
+              <a:t>Connect cookie flags to W5: HttpOnly stops XSS theft, SameSite stops CSRF, Secure forces HTTPS. Explain session fixation briefly (attacker sets the id before login). ~5 min.</a:t>
             </a:r>
             <a:endParaRPr lang="en-US" dirty="0"/>
           </a:p>
@@ -1840,7 +1840,7 @@
           <a:p>
             <a:r>
               <a:rPr lang="en-US" dirty="0"/>
-              <a:t/>
+              <a:t>Decode a JWT live (jwt.io) to show the payload is just base64 — NOT encrypted. The `alg:none` attack is the JWT Forgery game: server trusts the header's claimed algorithm. Emphasize: never put secrets in the payload. ~7 min.</a:t>
             </a:r>
             <a:endParaRPr lang="en-US" dirty="0"/>
           </a:p>
@@ -1928,7 +1928,7 @@
           <a:p>
             <a:r>
               <a:rPr lang="en-US" dirty="0"/>
-              <a:t/>
+              <a:t>Keep high-level (full OAuth is its own course). Key idea: "Login with Google" = delegation, you never give the app your Google password. The `state` parameter prevents CSRF on the callback. ~4 min.</a:t>
             </a:r>
             <a:endParaRPr lang="en-US" dirty="0"/>
           </a:p>
@@ -2016,7 +2016,7 @@
           <a:p>
             <a:r>
               <a:rPr lang="en-US" dirty="0"/>
-              <a:t/>
+              <a:t>The worked example — this is the IDOR Treasure Hunt. The server authenticated you but never checked the object BELONGS to you. Horizontal = peer data; vertical = privilege escalation. ~6 min.</a:t>
             </a:r>
             <a:endParaRPr lang="en-US" dirty="0"/>
           </a:p>
@@ -2104,7 +2104,7 @@
           <a:p>
             <a:r>
               <a:rPr lang="en-US" dirty="0"/>
-              <a:t/>
+              <a:t>Quick taxonomy; RBAC is what they'll implement in the lab. Stress the three best-practice principles — especially implicit deny (default to no access). ~4 min.</a:t>
             </a:r>
             <a:endParaRPr lang="en-US" dirty="0"/>
           </a:p>
@@ -4478,11 +4478,11 @@
         <p:spPr>
           <a:xfrm>
             <a:off x="457200" y="1325880"/>
-            <a:ext cx="8229600" cy="1828800"/>
+            <a:ext cx="8229600" cy="2139696"/>
           </a:xfrm>
           <a:prstGeom prst="roundRect">
             <a:avLst>
-              <a:gd name="adj" fmla="val 4000"/>
+              <a:gd name="adj" fmla="val 3419"/>
             </a:avLst>
           </a:prstGeom>
           <a:solidFill>
@@ -4507,7 +4507,7 @@
         <p:spPr>
           <a:xfrm>
             <a:off x="731520" y="1435608"/>
-            <a:ext cx="7680960" cy="1609344"/>
+            <a:ext cx="7680960" cy="1920240"/>
           </a:xfrm>
           <a:prstGeom prst="rect">
             <a:avLst/>
@@ -4620,6 +4620,27 @@
                 <a:cs typeface="Calibri" pitchFamily="34" charset="-120"/>
               </a:rPr>
               <a:t>RBAC / ABAC enforced centrally</a:t>
+            </a:r>
+            <a:endParaRPr lang="en-US" sz="1400" dirty="0"/>
+          </a:p>
+          <a:p>
+            <a:pPr marL="342900" indent="-342900">
+              <a:spcAft>
+                <a:spcPts val="600"/>
+              </a:spcAft>
+              <a:buSzPct val="100000"/>
+              <a:buChar char="•"/>
+            </a:pPr>
+            <a:r>
+              <a:rPr lang="en-US" sz="1400" dirty="0">
+                <a:solidFill>
+                  <a:srgbClr val="1F2937"/>
+                </a:solidFill>
+                <a:latin typeface="Calibri" pitchFamily="34" charset="0"/>
+                <a:ea typeface="Calibri" pitchFamily="34" charset="-122"/>
+                <a:cs typeface="Calibri" pitchFamily="34" charset="-120"/>
+              </a:rPr>
+              <a:t>Centralize the check — don't scatter if role==... everywhere</a:t>
             </a:r>
             <a:endParaRPr lang="en-US" sz="1400" dirty="0"/>
           </a:p>
@@ -6803,11 +6824,11 @@
         <p:spPr>
           <a:xfrm>
             <a:off x="457200" y="1325880"/>
-            <a:ext cx="8229600" cy="1207008"/>
+            <a:ext cx="8229600" cy="1517904"/>
           </a:xfrm>
           <a:prstGeom prst="roundRect">
             <a:avLst>
-              <a:gd name="adj" fmla="val 6061"/>
+              <a:gd name="adj" fmla="val 4819"/>
             </a:avLst>
           </a:prstGeom>
           <a:solidFill>
@@ -6832,7 +6853,7 @@
         <p:spPr>
           <a:xfrm>
             <a:off x="731520" y="1435608"/>
-            <a:ext cx="7680960" cy="987552"/>
+            <a:ext cx="7680960" cy="1298448"/>
           </a:xfrm>
           <a:prstGeom prst="rect">
             <a:avLst/>
@@ -6903,6 +6924,27 @@
                 <a:cs typeface="Calibri" pitchFamily="34" charset="-120"/>
               </a:rPr>
               <a:t>Proof the forged token / cross-user access now fails</a:t>
+            </a:r>
+            <a:endParaRPr lang="en-US" sz="1400" dirty="0"/>
+          </a:p>
+          <a:p>
+            <a:pPr marL="342900" indent="-342900">
+              <a:spcAft>
+                <a:spcPts val="600"/>
+              </a:spcAft>
+              <a:buSzPct val="100000"/>
+              <a:buChar char="•"/>
+            </a:pPr>
+            <a:r>
+              <a:rPr lang="en-US" sz="1400" dirty="0">
+                <a:solidFill>
+                  <a:srgbClr val="1F2937"/>
+                </a:solidFill>
+                <a:latin typeface="Calibri" pitchFamily="34" charset="0"/>
+                <a:ea typeface="Calibri" pitchFamily="34" charset="-122"/>
+                <a:cs typeface="Calibri" pitchFamily="34" charset="-120"/>
+              </a:rPr>
+              <a:t>+ Audit the AI / EiPE / Prompt Problem (see worksheet)</a:t>
             </a:r>
             <a:endParaRPr lang="en-US" sz="1400" dirty="0"/>
           </a:p>

--- a/slides/pptx/week06.pptx
+++ b/slides/pptx/week06.pptx
@@ -6246,7 +6246,68 @@
         </p:nvSpPr>
         <p:spPr>
           <a:xfrm>
-            <a:off x="502920" y="1325880"/>
+            <a:off x="457200" y="1325880"/>
+            <a:ext cx="8229600" cy="822960"/>
+          </a:xfrm>
+          <a:prstGeom prst="roundRect">
+            <a:avLst>
+              <a:gd name="adj" fmla="val 8889"/>
+            </a:avLst>
+          </a:prstGeom>
+          <a:solidFill>
+            <a:srgbClr val="E8EDF3"/>
+          </a:solidFill>
+          <a:ln/>
+        </p:spPr>
+      </p:sp>
+      <p:sp>
+        <p:nvSpPr>
+          <p:cNvPr id="6" name="Text 3"/>
+          <p:cNvSpPr/>
+          <p:nvPr/>
+        </p:nvSpPr>
+        <p:spPr>
+          <a:xfrm>
+            <a:off x="731520" y="1325880"/>
+            <a:ext cx="7680960" cy="822960"/>
+          </a:xfrm>
+          <a:prstGeom prst="rect">
+            <a:avLst/>
+          </a:prstGeom>
+          <a:noFill/>
+          <a:ln/>
+        </p:spPr>
+        <p:txBody>
+          <a:bodyPr wrap="square" lIns="0" tIns="0" rIns="0" bIns="0" rtlCol="0" anchor="ctr"/>
+          <a:lstStyle/>
+          <a:p>
+            <a:pPr indent="0" marL="0">
+              <a:buNone/>
+            </a:pPr>
+            <a:r>
+              <a:rPr lang="en-US" sz="1400" i="1" dirty="0">
+                <a:solidFill>
+                  <a:srgbClr val="E35205"/>
+                </a:solidFill>
+                <a:latin typeface="Calibri" pitchFamily="34" charset="0"/>
+                <a:ea typeface="Calibri" pitchFamily="34" charset="-122"/>
+                <a:cs typeface="Calibri" pitchFamily="34" charset="-120"/>
+              </a:rPr>
+              <a:t>📋 Worksheet 6 — labs/week06-authn-authz/worksheet.md (Part 3) · kickoff: docker compose up → http://localhost:5000</a:t>
+            </a:r>
+            <a:endParaRPr lang="en-US" sz="1400" dirty="0"/>
+          </a:p>
+        </p:txBody>
+      </p:sp>
+      <p:sp>
+        <p:nvSpPr>
+          <p:cNvPr id="7" name="Shape 4"/>
+          <p:cNvSpPr/>
+          <p:nvPr/>
+        </p:nvSpPr>
+        <p:spPr>
+          <a:xfrm>
+            <a:off x="502920" y="2313432"/>
             <a:ext cx="384048" cy="384048"/>
           </a:xfrm>
           <a:prstGeom prst="ellipse">
@@ -6260,13 +6321,13 @@
       </p:sp>
       <p:sp>
         <p:nvSpPr>
-          <p:cNvPr id="6" name="Text 3"/>
-          <p:cNvSpPr/>
-          <p:nvPr/>
-        </p:nvSpPr>
-        <p:spPr>
-          <a:xfrm>
-            <a:off x="502920" y="1325880"/>
+          <p:cNvPr id="8" name="Text 5"/>
+          <p:cNvSpPr/>
+          <p:nvPr/>
+        </p:nvSpPr>
+        <p:spPr>
+          <a:xfrm>
+            <a:off x="502920" y="2313432"/>
             <a:ext cx="384048" cy="384048"/>
           </a:xfrm>
           <a:prstGeom prst="rect">
@@ -6299,13 +6360,13 @@
       </p:sp>
       <p:sp>
         <p:nvSpPr>
-          <p:cNvPr id="7" name="Text 4"/>
-          <p:cNvSpPr/>
-          <p:nvPr/>
-        </p:nvSpPr>
-        <p:spPr>
-          <a:xfrm>
-            <a:off x="1051560" y="1325880"/>
+          <p:cNvPr id="9" name="Text 6"/>
+          <p:cNvSpPr/>
+          <p:nvPr/>
+        </p:nvSpPr>
+        <p:spPr>
+          <a:xfrm>
+            <a:off x="1051560" y="2313432"/>
             <a:ext cx="7589520" cy="384048"/>
           </a:xfrm>
           <a:prstGeom prst="rect">
@@ -6338,13 +6399,13 @@
       </p:sp>
       <p:sp>
         <p:nvSpPr>
-          <p:cNvPr id="8" name="Shape 5"/>
-          <p:cNvSpPr/>
-          <p:nvPr/>
-        </p:nvSpPr>
-        <p:spPr>
-          <a:xfrm>
-            <a:off x="502920" y="1783080"/>
+          <p:cNvPr id="10" name="Shape 7"/>
+          <p:cNvSpPr/>
+          <p:nvPr/>
+        </p:nvSpPr>
+        <p:spPr>
+          <a:xfrm>
+            <a:off x="502920" y="2770632"/>
             <a:ext cx="384048" cy="384048"/>
           </a:xfrm>
           <a:prstGeom prst="ellipse">
@@ -6358,13 +6419,13 @@
       </p:sp>
       <p:sp>
         <p:nvSpPr>
-          <p:cNvPr id="9" name="Text 6"/>
-          <p:cNvSpPr/>
-          <p:nvPr/>
-        </p:nvSpPr>
-        <p:spPr>
-          <a:xfrm>
-            <a:off x="502920" y="1783080"/>
+          <p:cNvPr id="11" name="Text 8"/>
+          <p:cNvSpPr/>
+          <p:nvPr/>
+        </p:nvSpPr>
+        <p:spPr>
+          <a:xfrm>
+            <a:off x="502920" y="2770632"/>
             <a:ext cx="384048" cy="384048"/>
           </a:xfrm>
           <a:prstGeom prst="rect">
@@ -6397,13 +6458,13 @@
       </p:sp>
       <p:sp>
         <p:nvSpPr>
-          <p:cNvPr id="10" name="Text 7"/>
-          <p:cNvSpPr/>
-          <p:nvPr/>
-        </p:nvSpPr>
-        <p:spPr>
-          <a:xfrm>
-            <a:off x="1051560" y="1783080"/>
+          <p:cNvPr id="12" name="Text 9"/>
+          <p:cNvSpPr/>
+          <p:nvPr/>
+        </p:nvSpPr>
+        <p:spPr>
+          <a:xfrm>
+            <a:off x="1051560" y="2770632"/>
             <a:ext cx="7589520" cy="384048"/>
           </a:xfrm>
           <a:prstGeom prst="rect">
@@ -6436,13 +6497,13 @@
       </p:sp>
       <p:sp>
         <p:nvSpPr>
-          <p:cNvPr id="11" name="Shape 8"/>
-          <p:cNvSpPr/>
-          <p:nvPr/>
-        </p:nvSpPr>
-        <p:spPr>
-          <a:xfrm>
-            <a:off x="502920" y="2240280"/>
+          <p:cNvPr id="13" name="Shape 10"/>
+          <p:cNvSpPr/>
+          <p:nvPr/>
+        </p:nvSpPr>
+        <p:spPr>
+          <a:xfrm>
+            <a:off x="502920" y="3227832"/>
             <a:ext cx="384048" cy="384048"/>
           </a:xfrm>
           <a:prstGeom prst="ellipse">
@@ -6456,13 +6517,13 @@
       </p:sp>
       <p:sp>
         <p:nvSpPr>
-          <p:cNvPr id="12" name="Text 9"/>
-          <p:cNvSpPr/>
-          <p:nvPr/>
-        </p:nvSpPr>
-        <p:spPr>
-          <a:xfrm>
-            <a:off x="502920" y="2240280"/>
+          <p:cNvPr id="14" name="Text 11"/>
+          <p:cNvSpPr/>
+          <p:nvPr/>
+        </p:nvSpPr>
+        <p:spPr>
+          <a:xfrm>
+            <a:off x="502920" y="3227832"/>
             <a:ext cx="384048" cy="384048"/>
           </a:xfrm>
           <a:prstGeom prst="rect">
@@ -6495,13 +6556,13 @@
       </p:sp>
       <p:sp>
         <p:nvSpPr>
-          <p:cNvPr id="13" name="Text 10"/>
-          <p:cNvSpPr/>
-          <p:nvPr/>
-        </p:nvSpPr>
-        <p:spPr>
-          <a:xfrm>
-            <a:off x="1051560" y="2240280"/>
+          <p:cNvPr id="15" name="Text 12"/>
+          <p:cNvSpPr/>
+          <p:nvPr/>
+        </p:nvSpPr>
+        <p:spPr>
+          <a:xfrm>
+            <a:off x="1051560" y="3227832"/>
             <a:ext cx="7589520" cy="384048"/>
           </a:xfrm>
           <a:prstGeom prst="rect">
@@ -6534,13 +6595,13 @@
       </p:sp>
       <p:sp>
         <p:nvSpPr>
-          <p:cNvPr id="14" name="Shape 11"/>
-          <p:cNvSpPr/>
-          <p:nvPr/>
-        </p:nvSpPr>
-        <p:spPr>
-          <a:xfrm>
-            <a:off x="502920" y="2697480"/>
+          <p:cNvPr id="16" name="Shape 13"/>
+          <p:cNvSpPr/>
+          <p:nvPr/>
+        </p:nvSpPr>
+        <p:spPr>
+          <a:xfrm>
+            <a:off x="502920" y="3685032"/>
             <a:ext cx="384048" cy="384048"/>
           </a:xfrm>
           <a:prstGeom prst="ellipse">
@@ -6554,13 +6615,13 @@
       </p:sp>
       <p:sp>
         <p:nvSpPr>
-          <p:cNvPr id="15" name="Text 12"/>
-          <p:cNvSpPr/>
-          <p:nvPr/>
-        </p:nvSpPr>
-        <p:spPr>
-          <a:xfrm>
-            <a:off x="502920" y="2697480"/>
+          <p:cNvPr id="17" name="Text 14"/>
+          <p:cNvSpPr/>
+          <p:nvPr/>
+        </p:nvSpPr>
+        <p:spPr>
+          <a:xfrm>
+            <a:off x="502920" y="3685032"/>
             <a:ext cx="384048" cy="384048"/>
           </a:xfrm>
           <a:prstGeom prst="rect">
@@ -6593,13 +6654,13 @@
       </p:sp>
       <p:sp>
         <p:nvSpPr>
-          <p:cNvPr id="16" name="Text 13"/>
-          <p:cNvSpPr/>
-          <p:nvPr/>
-        </p:nvSpPr>
-        <p:spPr>
-          <a:xfrm>
-            <a:off x="1051560" y="2697480"/>
+          <p:cNvPr id="18" name="Text 15"/>
+          <p:cNvSpPr/>
+          <p:nvPr/>
+        </p:nvSpPr>
+        <p:spPr>
+          <a:xfrm>
+            <a:off x="1051560" y="3685032"/>
             <a:ext cx="7589520" cy="384048"/>
           </a:xfrm>
           <a:prstGeom prst="rect">
@@ -6632,7 +6693,7 @@
       </p:sp>
       <p:sp>
         <p:nvSpPr>
-          <p:cNvPr id="17" name="Text 14"/>
+          <p:cNvPr id="19" name="Text 16"/>
           <p:cNvSpPr/>
           <p:nvPr/>
         </p:nvSpPr>
@@ -6671,7 +6732,7 @@
       </p:sp>
       <p:pic>
         <p:nvPicPr>
-          <p:cNvPr id="18" name="Image 1" descr="/Users/pop7/Library/CloudStorage/OneDrive-MonsterConnectCo.,Ltd/Lecture/KOSEN69 - software-security/slides/pptx/assets/logo-small.png">    </p:cNvPr>
+          <p:cNvPr id="20" name="Image 1" descr="/Users/pop7/Library/CloudStorage/OneDrive-MonsterConnectCo.,Ltd/Lecture/KOSEN69 - software-security/slides/pptx/assets/logo-small.png">    </p:cNvPr>
           <p:cNvPicPr>
             <a:picLocks noChangeAspect="1"/>
           </p:cNvPicPr>

--- a/slides/pptx/week06.pptx
+++ b/slides/pptx/week06.pptx
@@ -6293,7 +6293,7 @@
                 <a:ea typeface="Calibri" pitchFamily="34" charset="-122"/>
                 <a:cs typeface="Calibri" pitchFamily="34" charset="-120"/>
               </a:rPr>
-              <a:t>📋 Worksheet 6 — labs/week06-authn-authz/worksheet.md (Part 3) · kickoff: docker compose up → http://localhost:5000</a:t>
+              <a:t>📋 Worksheet 6 — labs/week06-authn-authz/worksheet.md (Part 3) · kickoff: docker compose up → http://localhost:8080</a:t>
             </a:r>
             <a:endParaRPr lang="en-US" sz="1400" dirty="0"/>
           </a:p>
